--- a/slides/spatial_joins.pptx
+++ b/slides/spatial_joins.pptx
@@ -3691,9 +3691,16 @@
             <p:ph idx="1"/>
           </p:nvPr>
         </p:nvSpPr>
-        <p:spPr/>
-        <p:txBody>
-          <a:bodyPr/>
+        <p:spPr>
+          <a:xfrm>
+            <a:off x="1451579" y="1853754"/>
+            <a:ext cx="9603275" cy="4288629"/>
+          </a:xfrm>
+        </p:spPr>
+        <p:txBody>
+          <a:bodyPr>
+            <a:normAutofit/>
+          </a:bodyPr>
           <a:lstStyle/>
           <a:p>
             <a:r>
@@ -3705,6 +3712,13 @@
             <a:pPr lvl="1"/>
             <a:r>
               <a:rPr lang="en-US" dirty="0"/>
+              <a:t>Read ch15, but we won’t cover all now. </a:t>
+            </a:r>
+          </a:p>
+          <a:p>
+            <a:pPr lvl="1"/>
+            <a:r>
+              <a:rPr lang="en-US" dirty="0"/>
               <a:t>Spatial data. (ELECTION… data files)</a:t>
             </a:r>
           </a:p>
@@ -3719,7 +3733,40 @@
             <a:pPr lvl="1"/>
             <a:r>
               <a:rPr lang="en-US" dirty="0"/>
+              <a:t>Direct map layering. </a:t>
+            </a:r>
+          </a:p>
+          <a:p>
+            <a:pPr lvl="1"/>
+            <a:r>
+              <a:rPr lang="en-US" dirty="0"/>
               <a:t>Make an election map!</a:t>
+            </a:r>
+          </a:p>
+          <a:p>
+            <a:r>
+              <a:rPr lang="en-US" dirty="0"/>
+              <a:t>The thinking behind the fixed stuff is important for complex things. </a:t>
+            </a:r>
+          </a:p>
+          <a:p>
+            <a:r>
+              <a:rPr lang="en-US" dirty="0"/>
+              <a:t>There’s some tests coming up!</a:t>
+            </a:r>
+          </a:p>
+          <a:p>
+            <a:pPr lvl="1"/>
+            <a:r>
+              <a:rPr lang="en-US" dirty="0"/>
+              <a:t>Exam – there’s a guide up. </a:t>
+            </a:r>
+          </a:p>
+          <a:p>
+            <a:pPr lvl="1"/>
+            <a:r>
+              <a:rPr lang="en-US" dirty="0"/>
+              <a:t>Tableau quiz – there’s another sample.</a:t>
             </a:r>
           </a:p>
         </p:txBody>

--- a/slides/spatial_joins.pptx
+++ b/slides/spatial_joins.pptx
@@ -6,28 +6,32 @@
   </p:sldMasterIdLst>
   <p:sldIdLst>
     <p:sldId id="276" r:id="rId2"/>
-    <p:sldId id="256" r:id="rId3"/>
-    <p:sldId id="257" r:id="rId4"/>
-    <p:sldId id="259" r:id="rId5"/>
-    <p:sldId id="260" r:id="rId6"/>
-    <p:sldId id="261" r:id="rId7"/>
-    <p:sldId id="273" r:id="rId8"/>
-    <p:sldId id="262" r:id="rId9"/>
-    <p:sldId id="263" r:id="rId10"/>
-    <p:sldId id="266" r:id="rId11"/>
-    <p:sldId id="274" r:id="rId12"/>
-    <p:sldId id="265" r:id="rId13"/>
-    <p:sldId id="270" r:id="rId14"/>
-    <p:sldId id="271" r:id="rId15"/>
-    <p:sldId id="275" r:id="rId16"/>
-    <p:sldId id="267" r:id="rId17"/>
-    <p:sldId id="268" r:id="rId18"/>
-    <p:sldId id="272" r:id="rId19"/>
-    <p:sldId id="278" r:id="rId20"/>
-    <p:sldId id="277" r:id="rId21"/>
-    <p:sldId id="269" r:id="rId22"/>
-    <p:sldId id="280" r:id="rId23"/>
-    <p:sldId id="279" r:id="rId24"/>
+    <p:sldId id="284" r:id="rId3"/>
+    <p:sldId id="256" r:id="rId4"/>
+    <p:sldId id="257" r:id="rId5"/>
+    <p:sldId id="259" r:id="rId6"/>
+    <p:sldId id="260" r:id="rId7"/>
+    <p:sldId id="261" r:id="rId8"/>
+    <p:sldId id="273" r:id="rId9"/>
+    <p:sldId id="262" r:id="rId10"/>
+    <p:sldId id="263" r:id="rId11"/>
+    <p:sldId id="266" r:id="rId12"/>
+    <p:sldId id="274" r:id="rId13"/>
+    <p:sldId id="265" r:id="rId14"/>
+    <p:sldId id="270" r:id="rId15"/>
+    <p:sldId id="271" r:id="rId16"/>
+    <p:sldId id="275" r:id="rId17"/>
+    <p:sldId id="281" r:id="rId18"/>
+    <p:sldId id="282" r:id="rId19"/>
+    <p:sldId id="283" r:id="rId20"/>
+    <p:sldId id="267" r:id="rId21"/>
+    <p:sldId id="268" r:id="rId22"/>
+    <p:sldId id="272" r:id="rId23"/>
+    <p:sldId id="278" r:id="rId24"/>
+    <p:sldId id="277" r:id="rId25"/>
+    <p:sldId id="269" r:id="rId26"/>
+    <p:sldId id="280" r:id="rId27"/>
+    <p:sldId id="279" r:id="rId28"/>
   </p:sldIdLst>
   <p:sldSz cx="12192000" cy="6858000"/>
   <p:notesSz cx="6858000" cy="9144000"/>
@@ -273,7 +277,7 @@
           <a:p>
             <a:fld id="{64D57B00-29D9-8D49-8BE6-64C195F64337}" type="datetimeFigureOut">
               <a:rPr lang="en-US" smtClean="0"/>
-              <a:t>10/2/25</a:t>
+              <a:t>2/10/26</a:t>
             </a:fld>
             <a:endParaRPr lang="en-US"/>
           </a:p>
@@ -484,7 +488,7 @@
           <a:p>
             <a:fld id="{64D57B00-29D9-8D49-8BE6-64C195F64337}" type="datetimeFigureOut">
               <a:rPr lang="en-US" smtClean="0"/>
-              <a:t>10/2/25</a:t>
+              <a:t>2/10/26</a:t>
             </a:fld>
             <a:endParaRPr lang="en-US"/>
           </a:p>
@@ -699,7 +703,7 @@
           <a:p>
             <a:fld id="{64D57B00-29D9-8D49-8BE6-64C195F64337}" type="datetimeFigureOut">
               <a:rPr lang="en-US" smtClean="0"/>
-              <a:t>10/2/25</a:t>
+              <a:t>2/10/26</a:t>
             </a:fld>
             <a:endParaRPr lang="en-US"/>
           </a:p>
@@ -900,7 +904,7 @@
           <a:p>
             <a:fld id="{64D57B00-29D9-8D49-8BE6-64C195F64337}" type="datetimeFigureOut">
               <a:rPr lang="en-US" smtClean="0"/>
-              <a:t>10/2/25</a:t>
+              <a:t>2/10/26</a:t>
             </a:fld>
             <a:endParaRPr lang="en-US"/>
           </a:p>
@@ -1179,7 +1183,7 @@
           <a:p>
             <a:fld id="{64D57B00-29D9-8D49-8BE6-64C195F64337}" type="datetimeFigureOut">
               <a:rPr lang="en-US" smtClean="0"/>
-              <a:t>10/2/25</a:t>
+              <a:t>2/10/26</a:t>
             </a:fld>
             <a:endParaRPr lang="en-US"/>
           </a:p>
@@ -1447,7 +1451,7 @@
           <a:p>
             <a:fld id="{64D57B00-29D9-8D49-8BE6-64C195F64337}" type="datetimeFigureOut">
               <a:rPr lang="en-US" smtClean="0"/>
-              <a:t>10/2/25</a:t>
+              <a:t>2/10/26</a:t>
             </a:fld>
             <a:endParaRPr lang="en-US"/>
           </a:p>
@@ -1863,7 +1867,7 @@
           <a:p>
             <a:fld id="{64D57B00-29D9-8D49-8BE6-64C195F64337}" type="datetimeFigureOut">
               <a:rPr lang="en-US" smtClean="0"/>
-              <a:t>10/2/25</a:t>
+              <a:t>2/10/26</a:t>
             </a:fld>
             <a:endParaRPr lang="en-US"/>
           </a:p>
@@ -2012,7 +2016,7 @@
           <a:p>
             <a:fld id="{64D57B00-29D9-8D49-8BE6-64C195F64337}" type="datetimeFigureOut">
               <a:rPr lang="en-US" smtClean="0"/>
-              <a:t>10/2/25</a:t>
+              <a:t>2/10/26</a:t>
             </a:fld>
             <a:endParaRPr lang="en-US"/>
           </a:p>
@@ -2138,7 +2142,7 @@
           <a:p>
             <a:fld id="{64D57B00-29D9-8D49-8BE6-64C195F64337}" type="datetimeFigureOut">
               <a:rPr lang="en-US" smtClean="0"/>
-              <a:t>10/2/25</a:t>
+              <a:t>2/10/26</a:t>
             </a:fld>
             <a:endParaRPr lang="en-US"/>
           </a:p>
@@ -2389,7 +2393,7 @@
           <a:p>
             <a:fld id="{64D57B00-29D9-8D49-8BE6-64C195F64337}" type="datetimeFigureOut">
               <a:rPr lang="en-US" smtClean="0"/>
-              <a:t>10/2/25</a:t>
+              <a:t>2/10/26</a:t>
             </a:fld>
             <a:endParaRPr lang="en-US"/>
           </a:p>
@@ -2834,7 +2838,7 @@
           <a:p>
             <a:fld id="{64D57B00-29D9-8D49-8BE6-64C195F64337}" type="datetimeFigureOut">
               <a:rPr lang="en-US" smtClean="0"/>
-              <a:t>10/2/25</a:t>
+              <a:t>2/10/26</a:t>
             </a:fld>
             <a:endParaRPr lang="en-US"/>
           </a:p>
@@ -3001,6 +3005,13 @@
             <a:schemeClr val="lt1"/>
           </a:fontRef>
         </p:style>
+        <p:txBody>
+          <a:bodyPr/>
+          <a:lstStyle/>
+          <a:p>
+            <a:endParaRPr lang="en-US"/>
+          </a:p>
+        </p:txBody>
       </p:sp>
       <p:pic>
         <p:nvPicPr>
@@ -3161,7 +3172,7 @@
           <a:p>
             <a:fld id="{64D57B00-29D9-8D49-8BE6-64C195F64337}" type="datetimeFigureOut">
               <a:rPr lang="en-US" smtClean="0"/>
-              <a:t>10/2/25</a:t>
+              <a:t>2/10/26</a:t>
             </a:fld>
             <a:endParaRPr lang="en-US"/>
           </a:p>
@@ -3725,8 +3736,12 @@
           <a:p>
             <a:pPr lvl="1"/>
             <a:r>
-              <a:rPr lang="en-US" dirty="0"/>
-              <a:t>Granularity and LOD (fixed) calculations. </a:t>
+              <a:rPr lang="en-US" b="1" dirty="0"/>
+              <a:t>Granularity and LOD (fixed) </a:t>
+            </a:r>
+            <a:r>
+              <a:rPr lang="en-US" dirty="0"/>
+              <a:t>calculations. </a:t>
             </a:r>
           </a:p>
           <a:p>
@@ -3750,23 +3765,24 @@
             </a:r>
           </a:p>
           <a:p>
-            <a:r>
-              <a:rPr lang="en-US" dirty="0"/>
-              <a:t>There’s some tests coming up!</a:t>
-            </a:r>
-          </a:p>
-          <a:p>
             <a:pPr lvl="1"/>
             <a:r>
               <a:rPr lang="en-US" dirty="0"/>
-              <a:t>Exam – there’s a guide up. </a:t>
-            </a:r>
-          </a:p>
-          <a:p>
-            <a:pPr lvl="1"/>
-            <a:r>
-              <a:rPr lang="en-US" dirty="0"/>
-              <a:t>Tableau quiz – there’s another sample.</a:t>
+              <a:t>Always think of “per” – one value per… person, item, year, customer per day, </a:t>
+            </a:r>
+            <a:r>
+              <a:rPr lang="en-US" dirty="0" err="1"/>
+              <a:t>etc</a:t>
+            </a:r>
+            <a:r>
+              <a:rPr lang="en-US" dirty="0"/>
+              <a:t>…</a:t>
+            </a:r>
+          </a:p>
+          <a:p>
+            <a:r>
+              <a:rPr lang="en-US" dirty="0"/>
+              <a:t>Assignment marks should be back…</a:t>
             </a:r>
           </a:p>
         </p:txBody>
@@ -3836,7 +3852,7 @@
           <p:cNvPr id="2" name="Title 1">
             <a:extLst>
               <a:ext uri="{FF2B5EF4-FFF2-40B4-BE49-F238E27FC236}">
-                <a16:creationId xmlns:a16="http://schemas.microsoft.com/office/drawing/2014/main" id="{BD2EF4BA-8F1E-CA71-3563-DA14A84DCFF0}"/>
+                <a16:creationId xmlns:a16="http://schemas.microsoft.com/office/drawing/2014/main" id="{69A847B1-0536-11E7-7CBE-A68404B71582}"/>
               </a:ext>
             </a:extLst>
           </p:cNvPr>
@@ -3854,7 +3870,7 @@
           <a:p>
             <a:r>
               <a:rPr lang="en-US" dirty="0"/>
-              <a:t>Lines</a:t>
+              <a:t>Points</a:t>
             </a:r>
           </a:p>
         </p:txBody>
@@ -3864,7 +3880,7 @@
           <p:cNvPr id="3" name="Content Placeholder 2">
             <a:extLst>
               <a:ext uri="{FF2B5EF4-FFF2-40B4-BE49-F238E27FC236}">
-                <a16:creationId xmlns:a16="http://schemas.microsoft.com/office/drawing/2014/main" id="{E5D2CC31-CDC5-602E-00D5-2EED7B13C0C1}"/>
+                <a16:creationId xmlns:a16="http://schemas.microsoft.com/office/drawing/2014/main" id="{CC29031A-00D2-22B4-EE1A-7F9A5C362507}"/>
               </a:ext>
             </a:extLst>
           </p:cNvPr>
@@ -3875,20 +3891,86 @@
             <p:ph idx="1"/>
           </p:nvPr>
         </p:nvSpPr>
-        <p:spPr/>
-        <p:txBody>
-          <a:bodyPr/>
-          <a:lstStyle/>
-          <a:p>
-            <a:r>
-              <a:rPr lang="en-US" dirty="0"/>
-              <a:t>Lines are paths that connect two spatial points. </a:t>
-            </a:r>
-          </a:p>
-          <a:p>
-            <a:r>
-              <a:rPr lang="en-US" dirty="0"/>
-              <a:t>Math using points, such as distance, will automatically figure out earth curvature. </a:t>
+        <p:spPr>
+          <a:xfrm>
+            <a:off x="1451579" y="2015732"/>
+            <a:ext cx="9603275" cy="4037749"/>
+          </a:xfrm>
+        </p:spPr>
+        <p:txBody>
+          <a:bodyPr/>
+          <a:lstStyle/>
+          <a:p>
+            <a:r>
+              <a:rPr lang="en-US" dirty="0"/>
+              <a:t>Points in spatial data are, well… points on a map. </a:t>
+            </a:r>
+          </a:p>
+          <a:p>
+            <a:r>
+              <a:rPr lang="en-US" dirty="0"/>
+              <a:t>Points are a special datatype that are constructed from </a:t>
+            </a:r>
+            <a:r>
+              <a:rPr lang="en-US" dirty="0" err="1"/>
+              <a:t>lat</a:t>
+            </a:r>
+            <a:r>
+              <a:rPr lang="en-US" dirty="0"/>
+              <a:t>/</a:t>
+            </a:r>
+            <a:r>
+              <a:rPr lang="en-US" dirty="0" err="1"/>
+              <a:t>lon</a:t>
+            </a:r>
+            <a:r>
+              <a:rPr lang="en-US" dirty="0"/>
+              <a:t>:</a:t>
+            </a:r>
+          </a:p>
+          <a:p>
+            <a:pPr lvl="1"/>
+            <a:r>
+              <a:rPr lang="en-US" dirty="0"/>
+              <a:t>We can make a point with the </a:t>
+            </a:r>
+            <a:r>
+              <a:rPr lang="en-US" dirty="0" err="1"/>
+              <a:t>Makepoint</a:t>
+            </a:r>
+            <a:r>
+              <a:rPr lang="en-US" dirty="0"/>
+              <a:t> function if we have latitude and longitude. </a:t>
+            </a:r>
+          </a:p>
+          <a:p>
+            <a:pPr lvl="1"/>
+            <a:r>
+              <a:rPr lang="en-US" dirty="0"/>
+              <a:t>The point data type is basically </a:t>
+            </a:r>
+            <a:r>
+              <a:rPr lang="en-US" dirty="0" err="1"/>
+              <a:t>lat</a:t>
+            </a:r>
+            <a:r>
+              <a:rPr lang="en-US" dirty="0"/>
+              <a:t>/</a:t>
+            </a:r>
+            <a:r>
+              <a:rPr lang="en-US" dirty="0" err="1"/>
+              <a:t>lon</a:t>
+            </a:r>
+            <a:r>
+              <a:rPr lang="en-US" dirty="0"/>
+              <a:t> + a ”type” that we don’t care about. </a:t>
+            </a:r>
+          </a:p>
+          <a:p>
+            <a:pPr lvl="1"/>
+            <a:r>
+              <a:rPr lang="en-US" dirty="0"/>
+              <a:t>Points allow all the other spatial functions like distance to work correctly. </a:t>
             </a:r>
           </a:p>
         </p:txBody>
@@ -3896,7 +3978,7 @@
     </p:spTree>
     <p:extLst>
       <p:ext uri="{BB962C8B-B14F-4D97-AF65-F5344CB8AC3E}">
-        <p14:creationId xmlns:p14="http://schemas.microsoft.com/office/powerpoint/2010/main" val="168733102"/>
+        <p14:creationId xmlns:p14="http://schemas.microsoft.com/office/powerpoint/2010/main" val="3966902185"/>
       </p:ext>
     </p:extLst>
   </p:cSld>
@@ -3928,6 +4010,98 @@
           <p:cNvPr id="2" name="Title 1">
             <a:extLst>
               <a:ext uri="{FF2B5EF4-FFF2-40B4-BE49-F238E27FC236}">
+                <a16:creationId xmlns:a16="http://schemas.microsoft.com/office/drawing/2014/main" id="{BD2EF4BA-8F1E-CA71-3563-DA14A84DCFF0}"/>
+              </a:ext>
+            </a:extLst>
+          </p:cNvPr>
+          <p:cNvSpPr>
+            <a:spLocks noGrp="1"/>
+          </p:cNvSpPr>
+          <p:nvPr>
+            <p:ph type="title"/>
+          </p:nvPr>
+        </p:nvSpPr>
+        <p:spPr/>
+        <p:txBody>
+          <a:bodyPr/>
+          <a:lstStyle/>
+          <a:p>
+            <a:r>
+              <a:rPr lang="en-US" dirty="0"/>
+              <a:t>Lines</a:t>
+            </a:r>
+          </a:p>
+        </p:txBody>
+      </p:sp>
+      <p:sp>
+        <p:nvSpPr>
+          <p:cNvPr id="3" name="Content Placeholder 2">
+            <a:extLst>
+              <a:ext uri="{FF2B5EF4-FFF2-40B4-BE49-F238E27FC236}">
+                <a16:creationId xmlns:a16="http://schemas.microsoft.com/office/drawing/2014/main" id="{E5D2CC31-CDC5-602E-00D5-2EED7B13C0C1}"/>
+              </a:ext>
+            </a:extLst>
+          </p:cNvPr>
+          <p:cNvSpPr>
+            <a:spLocks noGrp="1"/>
+          </p:cNvSpPr>
+          <p:nvPr>
+            <p:ph idx="1"/>
+          </p:nvPr>
+        </p:nvSpPr>
+        <p:spPr/>
+        <p:txBody>
+          <a:bodyPr/>
+          <a:lstStyle/>
+          <a:p>
+            <a:r>
+              <a:rPr lang="en-US" dirty="0"/>
+              <a:t>Lines are paths that connect two spatial points. </a:t>
+            </a:r>
+          </a:p>
+          <a:p>
+            <a:r>
+              <a:rPr lang="en-US" dirty="0"/>
+              <a:t>Math using points, such as distance, will automatically figure out earth curvature. </a:t>
+            </a:r>
+          </a:p>
+        </p:txBody>
+      </p:sp>
+    </p:spTree>
+    <p:extLst>
+      <p:ext uri="{BB962C8B-B14F-4D97-AF65-F5344CB8AC3E}">
+        <p14:creationId xmlns:p14="http://schemas.microsoft.com/office/powerpoint/2010/main" val="168733102"/>
+      </p:ext>
+    </p:extLst>
+  </p:cSld>
+  <p:clrMapOvr>
+    <a:masterClrMapping/>
+  </p:clrMapOvr>
+</p:sld>
+</file>
+
+<file path=ppt/slides/slide12.xml><?xml version="1.0" encoding="utf-8"?>
+<p:sld xmlns:a="http://schemas.openxmlformats.org/drawingml/2006/main" xmlns:r="http://schemas.openxmlformats.org/officeDocument/2006/relationships" xmlns:p="http://schemas.openxmlformats.org/presentationml/2006/main">
+  <p:cSld>
+    <p:spTree>
+      <p:nvGrpSpPr>
+        <p:cNvPr id="1" name=""/>
+        <p:cNvGrpSpPr/>
+        <p:nvPr/>
+      </p:nvGrpSpPr>
+      <p:grpSpPr>
+        <a:xfrm>
+          <a:off x="0" y="0"/>
+          <a:ext cx="0" cy="0"/>
+          <a:chOff x="0" y="0"/>
+          <a:chExt cx="0" cy="0"/>
+        </a:xfrm>
+      </p:grpSpPr>
+      <p:sp>
+        <p:nvSpPr>
+          <p:cNvPr id="2" name="Title 1">
+            <a:extLst>
+              <a:ext uri="{FF2B5EF4-FFF2-40B4-BE49-F238E27FC236}">
                 <a16:creationId xmlns:a16="http://schemas.microsoft.com/office/drawing/2014/main" id="{0974BAE3-B82B-60F4-7A70-6C8B719E1F2F}"/>
               </a:ext>
             </a:extLst>
@@ -4055,7 +4229,7 @@
 </p:sld>
 </file>
 
-<file path=ppt/slides/slide12.xml><?xml version="1.0" encoding="utf-8"?>
+<file path=ppt/slides/slide13.xml><?xml version="1.0" encoding="utf-8"?>
 <p:sld xmlns:a="http://schemas.openxmlformats.org/drawingml/2006/main" xmlns:r="http://schemas.openxmlformats.org/officeDocument/2006/relationships" xmlns:p="http://schemas.openxmlformats.org/presentationml/2006/main" show="0">
   <p:cSld>
     <p:spTree>
@@ -4169,89 +4343,6 @@
     <p:extLst>
       <p:ext uri="{BB962C8B-B14F-4D97-AF65-F5344CB8AC3E}">
         <p14:creationId xmlns:p14="http://schemas.microsoft.com/office/powerpoint/2010/main" val="2735527654"/>
-      </p:ext>
-    </p:extLst>
-  </p:cSld>
-  <p:clrMapOvr>
-    <a:masterClrMapping/>
-  </p:clrMapOvr>
-</p:sld>
-</file>
-
-<file path=ppt/slides/slide13.xml><?xml version="1.0" encoding="utf-8"?>
-<p:sld xmlns:a="http://schemas.openxmlformats.org/drawingml/2006/main" xmlns:r="http://schemas.openxmlformats.org/officeDocument/2006/relationships" xmlns:p="http://schemas.openxmlformats.org/presentationml/2006/main">
-  <p:cSld>
-    <p:spTree>
-      <p:nvGrpSpPr>
-        <p:cNvPr id="1" name=""/>
-        <p:cNvGrpSpPr/>
-        <p:nvPr/>
-      </p:nvGrpSpPr>
-      <p:grpSpPr>
-        <a:xfrm>
-          <a:off x="0" y="0"/>
-          <a:ext cx="0" cy="0"/>
-          <a:chOff x="0" y="0"/>
-          <a:chExt cx="0" cy="0"/>
-        </a:xfrm>
-      </p:grpSpPr>
-      <p:sp>
-        <p:nvSpPr>
-          <p:cNvPr id="2" name="Title 1">
-            <a:extLst>
-              <a:ext uri="{FF2B5EF4-FFF2-40B4-BE49-F238E27FC236}">
-                <a16:creationId xmlns:a16="http://schemas.microsoft.com/office/drawing/2014/main" id="{629B31EB-A7C1-5856-9F67-6F1173E575BA}"/>
-              </a:ext>
-            </a:extLst>
-          </p:cNvPr>
-          <p:cNvSpPr>
-            <a:spLocks noGrp="1"/>
-          </p:cNvSpPr>
-          <p:nvPr>
-            <p:ph type="title"/>
-          </p:nvPr>
-        </p:nvSpPr>
-        <p:spPr/>
-        <p:txBody>
-          <a:bodyPr/>
-          <a:lstStyle/>
-          <a:p>
-            <a:r>
-              <a:rPr lang="en-US" dirty="0"/>
-              <a:t>Fixed Calculations</a:t>
-            </a:r>
-          </a:p>
-        </p:txBody>
-      </p:sp>
-      <p:sp>
-        <p:nvSpPr>
-          <p:cNvPr id="3" name="Content Placeholder 2">
-            <a:extLst>
-              <a:ext uri="{FF2B5EF4-FFF2-40B4-BE49-F238E27FC236}">
-                <a16:creationId xmlns:a16="http://schemas.microsoft.com/office/drawing/2014/main" id="{9900B376-A193-ADEB-4FF6-78442E951938}"/>
-              </a:ext>
-            </a:extLst>
-          </p:cNvPr>
-          <p:cNvSpPr>
-            <a:spLocks noGrp="1"/>
-          </p:cNvSpPr>
-          <p:nvPr>
-            <p:ph idx="1"/>
-          </p:nvPr>
-        </p:nvSpPr>
-        <p:spPr/>
-        <p:txBody>
-          <a:bodyPr/>
-          <a:lstStyle/>
-          <a:p>
-            <a:endParaRPr lang="en-US"/>
-          </a:p>
-        </p:txBody>
-      </p:sp>
-    </p:spTree>
-    <p:extLst>
-      <p:ext uri="{BB962C8B-B14F-4D97-AF65-F5344CB8AC3E}">
-        <p14:creationId xmlns:p14="http://schemas.microsoft.com/office/powerpoint/2010/main" val="1331188681"/>
       </p:ext>
     </p:extLst>
   </p:cSld>
@@ -4283,6 +4374,89 @@
           <p:cNvPr id="2" name="Title 1">
             <a:extLst>
               <a:ext uri="{FF2B5EF4-FFF2-40B4-BE49-F238E27FC236}">
+                <a16:creationId xmlns:a16="http://schemas.microsoft.com/office/drawing/2014/main" id="{629B31EB-A7C1-5856-9F67-6F1173E575BA}"/>
+              </a:ext>
+            </a:extLst>
+          </p:cNvPr>
+          <p:cNvSpPr>
+            <a:spLocks noGrp="1"/>
+          </p:cNvSpPr>
+          <p:nvPr>
+            <p:ph type="title"/>
+          </p:nvPr>
+        </p:nvSpPr>
+        <p:spPr/>
+        <p:txBody>
+          <a:bodyPr/>
+          <a:lstStyle/>
+          <a:p>
+            <a:r>
+              <a:rPr lang="en-US" dirty="0"/>
+              <a:t>Fixed Calculations</a:t>
+            </a:r>
+          </a:p>
+        </p:txBody>
+      </p:sp>
+      <p:sp>
+        <p:nvSpPr>
+          <p:cNvPr id="3" name="Content Placeholder 2">
+            <a:extLst>
+              <a:ext uri="{FF2B5EF4-FFF2-40B4-BE49-F238E27FC236}">
+                <a16:creationId xmlns:a16="http://schemas.microsoft.com/office/drawing/2014/main" id="{9900B376-A193-ADEB-4FF6-78442E951938}"/>
+              </a:ext>
+            </a:extLst>
+          </p:cNvPr>
+          <p:cNvSpPr>
+            <a:spLocks noGrp="1"/>
+          </p:cNvSpPr>
+          <p:nvPr>
+            <p:ph idx="1"/>
+          </p:nvPr>
+        </p:nvSpPr>
+        <p:spPr/>
+        <p:txBody>
+          <a:bodyPr/>
+          <a:lstStyle/>
+          <a:p>
+            <a:endParaRPr lang="en-US"/>
+          </a:p>
+        </p:txBody>
+      </p:sp>
+    </p:spTree>
+    <p:extLst>
+      <p:ext uri="{BB962C8B-B14F-4D97-AF65-F5344CB8AC3E}">
+        <p14:creationId xmlns:p14="http://schemas.microsoft.com/office/powerpoint/2010/main" val="1331188681"/>
+      </p:ext>
+    </p:extLst>
+  </p:cSld>
+  <p:clrMapOvr>
+    <a:masterClrMapping/>
+  </p:clrMapOvr>
+</p:sld>
+</file>
+
+<file path=ppt/slides/slide15.xml><?xml version="1.0" encoding="utf-8"?>
+<p:sld xmlns:a="http://schemas.openxmlformats.org/drawingml/2006/main" xmlns:r="http://schemas.openxmlformats.org/officeDocument/2006/relationships" xmlns:p="http://schemas.openxmlformats.org/presentationml/2006/main">
+  <p:cSld>
+    <p:spTree>
+      <p:nvGrpSpPr>
+        <p:cNvPr id="1" name=""/>
+        <p:cNvGrpSpPr/>
+        <p:nvPr/>
+      </p:nvGrpSpPr>
+      <p:grpSpPr>
+        <a:xfrm>
+          <a:off x="0" y="0"/>
+          <a:ext cx="0" cy="0"/>
+          <a:chOff x="0" y="0"/>
+          <a:chExt cx="0" cy="0"/>
+        </a:xfrm>
+      </p:grpSpPr>
+      <p:sp>
+        <p:nvSpPr>
+          <p:cNvPr id="2" name="Title 1">
+            <a:extLst>
+              <a:ext uri="{FF2B5EF4-FFF2-40B4-BE49-F238E27FC236}">
                 <a16:creationId xmlns:a16="http://schemas.microsoft.com/office/drawing/2014/main" id="{7FC2382A-DEB0-8CD4-E7C7-5E31B8A8E192}"/>
               </a:ext>
             </a:extLst>
@@ -4437,7 +4611,7 @@
 </p:sld>
 </file>
 
-<file path=ppt/slides/slide15.xml><?xml version="1.0" encoding="utf-8"?>
+<file path=ppt/slides/slide16.xml><?xml version="1.0" encoding="utf-8"?>
 <p:sld xmlns:a="http://schemas.openxmlformats.org/drawingml/2006/main" xmlns:r="http://schemas.openxmlformats.org/officeDocument/2006/relationships" xmlns:p="http://schemas.openxmlformats.org/presentationml/2006/main">
   <p:cSld>
     <p:spTree>
@@ -4564,171 +4738,6 @@
 </p:sld>
 </file>
 
-<file path=ppt/slides/slide16.xml><?xml version="1.0" encoding="utf-8"?>
-<p:sld xmlns:a="http://schemas.openxmlformats.org/drawingml/2006/main" xmlns:r="http://schemas.openxmlformats.org/officeDocument/2006/relationships" xmlns:p="http://schemas.openxmlformats.org/presentationml/2006/main">
-  <p:cSld>
-    <p:spTree>
-      <p:nvGrpSpPr>
-        <p:cNvPr id="1" name=""/>
-        <p:cNvGrpSpPr/>
-        <p:nvPr/>
-      </p:nvGrpSpPr>
-      <p:grpSpPr>
-        <a:xfrm>
-          <a:off x="0" y="0"/>
-          <a:ext cx="0" cy="0"/>
-          <a:chOff x="0" y="0"/>
-          <a:chExt cx="0" cy="0"/>
-        </a:xfrm>
-      </p:grpSpPr>
-      <p:sp>
-        <p:nvSpPr>
-          <p:cNvPr id="2" name="Title 1">
-            <a:extLst>
-              <a:ext uri="{FF2B5EF4-FFF2-40B4-BE49-F238E27FC236}">
-                <a16:creationId xmlns:a16="http://schemas.microsoft.com/office/drawing/2014/main" id="{D6BF83D7-616E-3AAC-09E3-52E1E040BB57}"/>
-              </a:ext>
-            </a:extLst>
-          </p:cNvPr>
-          <p:cNvSpPr>
-            <a:spLocks noGrp="1"/>
-          </p:cNvSpPr>
-          <p:nvPr>
-            <p:ph type="title"/>
-          </p:nvPr>
-        </p:nvSpPr>
-        <p:spPr>
-          <a:xfrm>
-            <a:off x="1137147" y="804519"/>
-            <a:ext cx="9917708" cy="1049235"/>
-          </a:xfrm>
-        </p:spPr>
-        <p:txBody>
-          <a:bodyPr/>
-          <a:lstStyle/>
-          <a:p>
-            <a:r>
-              <a:rPr lang="en-US" dirty="0"/>
-              <a:t>Fixed Calculations</a:t>
-            </a:r>
-          </a:p>
-        </p:txBody>
-      </p:sp>
-      <p:sp>
-        <p:nvSpPr>
-          <p:cNvPr id="3" name="Content Placeholder 2">
-            <a:extLst>
-              <a:ext uri="{FF2B5EF4-FFF2-40B4-BE49-F238E27FC236}">
-                <a16:creationId xmlns:a16="http://schemas.microsoft.com/office/drawing/2014/main" id="{5041126C-8B0C-4DA0-A834-31276F94AB2E}"/>
-              </a:ext>
-            </a:extLst>
-          </p:cNvPr>
-          <p:cNvSpPr>
-            <a:spLocks noGrp="1"/>
-          </p:cNvSpPr>
-          <p:nvPr>
-            <p:ph idx="1"/>
-          </p:nvPr>
-        </p:nvSpPr>
-        <p:spPr>
-          <a:xfrm>
-            <a:off x="1451579" y="1853754"/>
-            <a:ext cx="9603275" cy="4199727"/>
-          </a:xfrm>
-        </p:spPr>
-        <p:txBody>
-          <a:bodyPr/>
-          <a:lstStyle/>
-          <a:p>
-            <a:r>
-              <a:rPr lang="en-US" dirty="0"/>
-              <a:t>Fixed allows us to do groupings and aggregations that are fixed. </a:t>
-            </a:r>
-          </a:p>
-          <a:p>
-            <a:r>
-              <a:rPr lang="en-US" dirty="0"/>
-              <a:t>Normally when we add things to Tableau, we have some aggregation and some grouping based on whatever is in the visualization. </a:t>
-            </a:r>
-          </a:p>
-          <a:p>
-            <a:r>
-              <a:rPr lang="en-US" dirty="0"/>
-              <a:t>If we want a calculation based on a grouping that isn’t in the visualization, we have an issue. </a:t>
-            </a:r>
-          </a:p>
-          <a:p>
-            <a:r>
-              <a:rPr lang="en-US" dirty="0"/>
-              <a:t>Fixed defines a specific calculation:</a:t>
-            </a:r>
-          </a:p>
-          <a:p>
-            <a:pPr lvl="1"/>
-            <a:r>
-              <a:rPr lang="en-US" dirty="0"/>
-              <a:t>Create one group for each value in this dimension. </a:t>
-            </a:r>
-          </a:p>
-          <a:p>
-            <a:pPr lvl="1"/>
-            <a:r>
-              <a:rPr lang="en-US" dirty="0"/>
-              <a:t>Generate this aggregation calculation for each of those groups. </a:t>
-            </a:r>
-          </a:p>
-          <a:p>
-            <a:pPr lvl="1"/>
-            <a:r>
-              <a:rPr lang="en-US" dirty="0"/>
-              <a:t>These values are totally unimpacted by the grouping in the visualization. </a:t>
-            </a:r>
-          </a:p>
-        </p:txBody>
-      </p:sp>
-      <p:pic>
-        <p:nvPicPr>
-          <p:cNvPr id="4" name="Picture 3">
-            <a:extLst>
-              <a:ext uri="{FF2B5EF4-FFF2-40B4-BE49-F238E27FC236}">
-                <a16:creationId xmlns:a16="http://schemas.microsoft.com/office/drawing/2014/main" id="{A55C2C24-54A1-4AEA-F68D-852ABAB8CAF8}"/>
-              </a:ext>
-            </a:extLst>
-          </p:cNvPr>
-          <p:cNvPicPr>
-            <a:picLocks noChangeAspect="1"/>
-          </p:cNvPicPr>
-          <p:nvPr/>
-        </p:nvPicPr>
-        <p:blipFill>
-          <a:blip r:embed="rId2"/>
-          <a:stretch>
-            <a:fillRect/>
-          </a:stretch>
-        </p:blipFill>
-        <p:spPr>
-          <a:xfrm>
-            <a:off x="5657930" y="17119"/>
-            <a:ext cx="6534069" cy="1330418"/>
-          </a:xfrm>
-          <a:prstGeom prst="rect">
-            <a:avLst/>
-          </a:prstGeom>
-        </p:spPr>
-      </p:pic>
-    </p:spTree>
-    <p:extLst>
-      <p:ext uri="{BB962C8B-B14F-4D97-AF65-F5344CB8AC3E}">
-        <p14:creationId xmlns:p14="http://schemas.microsoft.com/office/powerpoint/2010/main" val="3179373088"/>
-      </p:ext>
-    </p:extLst>
-  </p:cSld>
-  <p:clrMapOvr>
-    <a:masterClrMapping/>
-  </p:clrMapOvr>
-</p:sld>
-</file>
-
 <file path=ppt/slides/slide17.xml><?xml version="1.0" encoding="utf-8"?>
 <p:sld xmlns:a="http://schemas.openxmlformats.org/drawingml/2006/main" xmlns:r="http://schemas.openxmlformats.org/officeDocument/2006/relationships" xmlns:p="http://schemas.openxmlformats.org/presentationml/2006/main">
   <p:cSld>
@@ -4751,7 +4760,7 @@
           <p:cNvPr id="2" name="Title 1">
             <a:extLst>
               <a:ext uri="{FF2B5EF4-FFF2-40B4-BE49-F238E27FC236}">
-                <a16:creationId xmlns:a16="http://schemas.microsoft.com/office/drawing/2014/main" id="{472EB111-9331-2CF3-1BE2-256D4FE11074}"/>
+                <a16:creationId xmlns:a16="http://schemas.microsoft.com/office/drawing/2014/main" id="{2F887F06-312B-75EB-84C4-D40A03C76B1F}"/>
               </a:ext>
             </a:extLst>
           </p:cNvPr>
@@ -4769,7 +4778,7 @@
           <a:p>
             <a:r>
               <a:rPr lang="en-US" dirty="0"/>
-              <a:t>Fixed Usage</a:t>
+              <a:t>Note – Think About it</a:t>
             </a:r>
           </a:p>
         </p:txBody>
@@ -4779,7 +4788,7 @@
           <p:cNvPr id="3" name="Content Placeholder 2">
             <a:extLst>
               <a:ext uri="{FF2B5EF4-FFF2-40B4-BE49-F238E27FC236}">
-                <a16:creationId xmlns:a16="http://schemas.microsoft.com/office/drawing/2014/main" id="{7174C5BC-D6D9-034A-4B85-9BAF0DB50F1F}"/>
+                <a16:creationId xmlns:a16="http://schemas.microsoft.com/office/drawing/2014/main" id="{99B629AB-AE12-14E7-377E-888BC2A6B765}"/>
               </a:ext>
             </a:extLst>
           </p:cNvPr>
@@ -4792,8 +4801,8 @@
         </p:nvSpPr>
         <p:spPr>
           <a:xfrm>
-            <a:off x="300789" y="2015732"/>
-            <a:ext cx="11055070" cy="4037749"/>
+            <a:off x="1451579" y="2015732"/>
+            <a:ext cx="9603275" cy="4037749"/>
           </a:xfrm>
         </p:spPr>
         <p:txBody>
@@ -4802,85 +4811,56 @@
           <a:p>
             <a:r>
               <a:rPr lang="en-US" dirty="0"/>
-              <a:t>Fixed can give us something to compare to. </a:t>
+              <a:t>This granularity matters, and we need to consider it:</a:t>
             </a:r>
           </a:p>
           <a:p>
             <a:pPr lvl="1"/>
             <a:r>
               <a:rPr lang="en-US" dirty="0"/>
-              <a:t>I.e. we can tabulate the the most votes per riding. </a:t>
-            </a:r>
-          </a:p>
-          <a:p>
-            <a:r>
-              <a:rPr lang="en-US" dirty="0"/>
-              <a:t>E.g. If we want to see who is above or below the average sales per salesperson for each region</a:t>
+              <a:t>Just adding a value to a vis probably doesn’t do what we need. </a:t>
+            </a:r>
+          </a:p>
+          <a:p>
+            <a:pPr lvl="2"/>
+            <a:r>
+              <a:rPr lang="en-US" dirty="0"/>
+              <a:t>I.e. just adding “profit” doesn’t ensure profit is calculated in the way we need. </a:t>
             </a:r>
           </a:p>
           <a:p>
             <a:pPr lvl="1"/>
             <a:r>
               <a:rPr lang="en-US" dirty="0"/>
-              <a:t>we can define that average using fixed</a:t>
+              <a:t>Getting correct values requires thinking about it. </a:t>
+            </a:r>
+          </a:p>
+          <a:p>
+            <a:r>
+              <a:rPr lang="en-US" dirty="0"/>
+              <a:t>You want to be excessively explicit:</a:t>
             </a:r>
           </a:p>
           <a:p>
             <a:pPr lvl="1"/>
             <a:r>
               <a:rPr lang="en-US" dirty="0"/>
-              <a:t>that value isn’t impacted by adding or removing data to the visualization. </a:t>
+              <a:t>Every value is (technically) per something…</a:t>
             </a:r>
           </a:p>
           <a:p>
             <a:pPr lvl="1"/>
             <a:r>
               <a:rPr lang="en-US" dirty="0"/>
-              <a:t>We could add/remove individual salespeople from the vis without breaking things. </a:t>
-            </a:r>
-          </a:p>
-          <a:p>
-            <a:r>
-              <a:rPr lang="en-US" dirty="0"/>
-              <a:t>These things are fixed no matter the grouping/splitting of data. </a:t>
-            </a:r>
-          </a:p>
-        </p:txBody>
-      </p:sp>
-      <p:pic>
-        <p:nvPicPr>
-          <p:cNvPr id="4" name="Picture 3">
-            <a:extLst>
-              <a:ext uri="{FF2B5EF4-FFF2-40B4-BE49-F238E27FC236}">
-                <a16:creationId xmlns:a16="http://schemas.microsoft.com/office/drawing/2014/main" id="{C567B9EF-5C02-40B6-D865-CBAAC5D53255}"/>
-              </a:ext>
-            </a:extLst>
-          </p:cNvPr>
-          <p:cNvPicPr>
-            <a:picLocks noChangeAspect="1"/>
-          </p:cNvPicPr>
-          <p:nvPr/>
-        </p:nvPicPr>
-        <p:blipFill>
-          <a:blip r:embed="rId2"/>
-          <a:stretch>
-            <a:fillRect/>
-          </a:stretch>
-        </p:blipFill>
-        <p:spPr>
-          <a:xfrm>
-            <a:off x="5799220" y="0"/>
-            <a:ext cx="6392779" cy="2943917"/>
-          </a:xfrm>
-          <a:prstGeom prst="rect">
-            <a:avLst/>
-          </a:prstGeom>
-        </p:spPr>
-      </p:pic>
+              <a:t>Say it out before building. </a:t>
+            </a:r>
+          </a:p>
+        </p:txBody>
+      </p:sp>
     </p:spTree>
     <p:extLst>
       <p:ext uri="{BB962C8B-B14F-4D97-AF65-F5344CB8AC3E}">
-        <p14:creationId xmlns:p14="http://schemas.microsoft.com/office/powerpoint/2010/main" val="2956113032"/>
+        <p14:creationId xmlns:p14="http://schemas.microsoft.com/office/powerpoint/2010/main" val="3272679153"/>
       </p:ext>
     </p:extLst>
   </p:cSld>
@@ -4912,7 +4892,7 @@
           <p:cNvPr id="2" name="Title 1">
             <a:extLst>
               <a:ext uri="{FF2B5EF4-FFF2-40B4-BE49-F238E27FC236}">
-                <a16:creationId xmlns:a16="http://schemas.microsoft.com/office/drawing/2014/main" id="{C1D588E2-34B9-BE72-DA3B-F940F03661A5}"/>
+                <a16:creationId xmlns:a16="http://schemas.microsoft.com/office/drawing/2014/main" id="{C8C4F50E-D25F-156F-342E-4B6B1EA56A50}"/>
               </a:ext>
             </a:extLst>
           </p:cNvPr>
@@ -4930,7 +4910,7 @@
           <a:p>
             <a:r>
               <a:rPr lang="en-US" dirty="0"/>
-              <a:t>Include/Exclude</a:t>
+              <a:t>Granularity and Tableau</a:t>
             </a:r>
           </a:p>
         </p:txBody>
@@ -4940,7 +4920,7 @@
           <p:cNvPr id="3" name="Content Placeholder 2">
             <a:extLst>
               <a:ext uri="{FF2B5EF4-FFF2-40B4-BE49-F238E27FC236}">
-                <a16:creationId xmlns:a16="http://schemas.microsoft.com/office/drawing/2014/main" id="{207C1D44-8F6C-FB06-27EC-3EA2C7D2ED96}"/>
+                <a16:creationId xmlns:a16="http://schemas.microsoft.com/office/drawing/2014/main" id="{3FA802F7-DC3E-D479-9CDF-15537ED3ABAF}"/>
               </a:ext>
             </a:extLst>
           </p:cNvPr>
@@ -4953,8 +4933,8 @@
         </p:nvSpPr>
         <p:spPr>
           <a:xfrm>
-            <a:off x="1451579" y="2015732"/>
-            <a:ext cx="9603275" cy="4037749"/>
+            <a:off x="1451579" y="1853754"/>
+            <a:ext cx="9603275" cy="2175505"/>
           </a:xfrm>
         </p:spPr>
         <p:txBody>
@@ -4963,69 +4943,64 @@
           <a:p>
             <a:r>
               <a:rPr lang="en-US" dirty="0"/>
-              <a:t>Include and exclude are similar-</a:t>
-            </a:r>
-            <a:r>
-              <a:rPr lang="en-US" dirty="0" err="1"/>
-              <a:t>ish</a:t>
-            </a:r>
-            <a:r>
-              <a:rPr lang="en-US" dirty="0"/>
-              <a:t> functions to fixed. </a:t>
+              <a:t>Generally, each dimension in the shelf will ‘split’ the data. </a:t>
+            </a:r>
+          </a:p>
+          <a:p>
+            <a:r>
+              <a:rPr lang="en-US" dirty="0"/>
+              <a:t>If we have several, we get multiple ‘pers’:</a:t>
             </a:r>
           </a:p>
           <a:p>
             <a:pPr lvl="1"/>
             <a:r>
               <a:rPr lang="en-US" dirty="0"/>
-              <a:t>Include will tell Tableau to aggregate by something. </a:t>
-            </a:r>
-          </a:p>
-          <a:p>
-            <a:pPr lvl="1"/>
-            <a:r>
-              <a:rPr lang="en-US" dirty="0"/>
-              <a:t>Exclude will tell Tableau to not-aggregate by something. </a:t>
-            </a:r>
-          </a:p>
-          <a:p>
-            <a:r>
-              <a:rPr lang="en-US" dirty="0"/>
-              <a:t>Include can force some aggregation in all cases. </a:t>
-            </a:r>
-          </a:p>
-          <a:p>
-            <a:pPr lvl="1"/>
-            <a:r>
-              <a:rPr lang="en-US" dirty="0"/>
-              <a:t>E.g. force something to average differently. </a:t>
-            </a:r>
-          </a:p>
-          <a:p>
-            <a:r>
-              <a:rPr lang="en-US" dirty="0"/>
-              <a:t>Exclude can force something to not be aggregated in all cases. </a:t>
-            </a:r>
-          </a:p>
-          <a:p>
-            <a:pPr lvl="1"/>
-            <a:r>
-              <a:rPr lang="en-US" dirty="0"/>
-              <a:t>Exclude some value from being aggregated by specific values. </a:t>
-            </a:r>
-          </a:p>
-          <a:p>
-            <a:r>
-              <a:rPr lang="en-US" dirty="0"/>
-              <a:t>I find these more confusing vs just using fixed, but that’s just me. </a:t>
-            </a:r>
-          </a:p>
-        </p:txBody>
-      </p:sp>
+              <a:t>E.g. average sales per product per store per day. </a:t>
+            </a:r>
+          </a:p>
+          <a:p>
+            <a:r>
+              <a:rPr lang="en-US" dirty="0"/>
+              <a:t>Make sure that the aggregation you want is what you get. </a:t>
+            </a:r>
+          </a:p>
+        </p:txBody>
+      </p:sp>
+      <p:pic>
+        <p:nvPicPr>
+          <p:cNvPr id="4" name="Picture 3">
+            <a:extLst>
+              <a:ext uri="{FF2B5EF4-FFF2-40B4-BE49-F238E27FC236}">
+                <a16:creationId xmlns:a16="http://schemas.microsoft.com/office/drawing/2014/main" id="{AB034EF2-8C12-7E0F-53BA-D45AE10453B4}"/>
+              </a:ext>
+            </a:extLst>
+          </p:cNvPr>
+          <p:cNvPicPr>
+            <a:picLocks noChangeAspect="1"/>
+          </p:cNvPicPr>
+          <p:nvPr/>
+        </p:nvPicPr>
+        <p:blipFill>
+          <a:blip r:embed="rId2"/>
+          <a:stretch>
+            <a:fillRect/>
+          </a:stretch>
+        </p:blipFill>
+        <p:spPr>
+          <a:xfrm>
+            <a:off x="2367016" y="4097657"/>
+            <a:ext cx="7772400" cy="2175505"/>
+          </a:xfrm>
+          <a:prstGeom prst="rect">
+            <a:avLst/>
+          </a:prstGeom>
+        </p:spPr>
+      </p:pic>
     </p:spTree>
     <p:extLst>
       <p:ext uri="{BB962C8B-B14F-4D97-AF65-F5344CB8AC3E}">
-        <p14:creationId xmlns:p14="http://schemas.microsoft.com/office/powerpoint/2010/main" val="2318927698"/>
+        <p14:creationId xmlns:p14="http://schemas.microsoft.com/office/powerpoint/2010/main" val="4118772652"/>
       </p:ext>
     </p:extLst>
   </p:cSld>
@@ -5057,6 +5032,718 @@
           <p:cNvPr id="2" name="Title 1">
             <a:extLst>
               <a:ext uri="{FF2B5EF4-FFF2-40B4-BE49-F238E27FC236}">
+                <a16:creationId xmlns:a16="http://schemas.microsoft.com/office/drawing/2014/main" id="{4926826E-8A1E-4FDD-35AC-ADE58D14E620}"/>
+              </a:ext>
+            </a:extLst>
+          </p:cNvPr>
+          <p:cNvSpPr>
+            <a:spLocks noGrp="1"/>
+          </p:cNvSpPr>
+          <p:nvPr>
+            <p:ph type="title"/>
+          </p:nvPr>
+        </p:nvSpPr>
+        <p:spPr/>
+        <p:txBody>
+          <a:bodyPr/>
+          <a:lstStyle/>
+          <a:p>
+            <a:r>
+              <a:rPr lang="en-US" dirty="0"/>
+              <a:t>Level of Detail Calculations</a:t>
+            </a:r>
+          </a:p>
+        </p:txBody>
+      </p:sp>
+      <p:sp>
+        <p:nvSpPr>
+          <p:cNvPr id="3" name="Content Placeholder 2">
+            <a:extLst>
+              <a:ext uri="{FF2B5EF4-FFF2-40B4-BE49-F238E27FC236}">
+                <a16:creationId xmlns:a16="http://schemas.microsoft.com/office/drawing/2014/main" id="{84704C26-DDF3-6880-0E48-7215B2ED17E2}"/>
+              </a:ext>
+            </a:extLst>
+          </p:cNvPr>
+          <p:cNvSpPr>
+            <a:spLocks noGrp="1"/>
+          </p:cNvSpPr>
+          <p:nvPr>
+            <p:ph idx="1"/>
+          </p:nvPr>
+        </p:nvSpPr>
+        <p:spPr/>
+        <p:txBody>
+          <a:bodyPr/>
+          <a:lstStyle/>
+          <a:p>
+            <a:r>
+              <a:rPr lang="en-US" dirty="0"/>
+              <a:t>Everything in a visualization is automatically impacted by grouping. </a:t>
+            </a:r>
+          </a:p>
+          <a:p>
+            <a:r>
+              <a:rPr lang="en-US" dirty="0"/>
+              <a:t>What if what we want to show differs?</a:t>
+            </a:r>
+          </a:p>
+          <a:p>
+            <a:endParaRPr lang="en-US" dirty="0"/>
+          </a:p>
+          <a:p>
+            <a:r>
+              <a:rPr lang="en-US" dirty="0"/>
+              <a:t>Level of detail calculations allow us to separately control the grouping. </a:t>
+            </a:r>
+          </a:p>
+        </p:txBody>
+      </p:sp>
+    </p:spTree>
+    <p:extLst>
+      <p:ext uri="{BB962C8B-B14F-4D97-AF65-F5344CB8AC3E}">
+        <p14:creationId xmlns:p14="http://schemas.microsoft.com/office/powerpoint/2010/main" val="3171993287"/>
+      </p:ext>
+    </p:extLst>
+  </p:cSld>
+  <p:clrMapOvr>
+    <a:masterClrMapping/>
+  </p:clrMapOvr>
+</p:sld>
+</file>
+
+<file path=ppt/slides/slide2.xml><?xml version="1.0" encoding="utf-8"?>
+<p:sld xmlns:a="http://schemas.openxmlformats.org/drawingml/2006/main" xmlns:r="http://schemas.openxmlformats.org/officeDocument/2006/relationships" xmlns:p="http://schemas.openxmlformats.org/presentationml/2006/main">
+  <p:cSld>
+    <p:spTree>
+      <p:nvGrpSpPr>
+        <p:cNvPr id="1" name=""/>
+        <p:cNvGrpSpPr/>
+        <p:nvPr/>
+      </p:nvGrpSpPr>
+      <p:grpSpPr>
+        <a:xfrm>
+          <a:off x="0" y="0"/>
+          <a:ext cx="0" cy="0"/>
+          <a:chOff x="0" y="0"/>
+          <a:chExt cx="0" cy="0"/>
+        </a:xfrm>
+      </p:grpSpPr>
+      <p:sp>
+        <p:nvSpPr>
+          <p:cNvPr id="2" name="Title 1">
+            <a:extLst>
+              <a:ext uri="{FF2B5EF4-FFF2-40B4-BE49-F238E27FC236}">
+                <a16:creationId xmlns:a16="http://schemas.microsoft.com/office/drawing/2014/main" id="{93ACD540-446D-7D14-81BE-5F941DCD7BCD}"/>
+              </a:ext>
+            </a:extLst>
+          </p:cNvPr>
+          <p:cNvSpPr>
+            <a:spLocks noGrp="1"/>
+          </p:cNvSpPr>
+          <p:nvPr>
+            <p:ph type="title"/>
+          </p:nvPr>
+        </p:nvSpPr>
+        <p:spPr/>
+        <p:txBody>
+          <a:bodyPr/>
+          <a:lstStyle/>
+          <a:p>
+            <a:r>
+              <a:rPr lang="en-US" dirty="0"/>
+              <a:t>Last Assignment</a:t>
+            </a:r>
+          </a:p>
+        </p:txBody>
+      </p:sp>
+      <p:sp>
+        <p:nvSpPr>
+          <p:cNvPr id="3" name="Content Placeholder 2">
+            <a:extLst>
+              <a:ext uri="{FF2B5EF4-FFF2-40B4-BE49-F238E27FC236}">
+                <a16:creationId xmlns:a16="http://schemas.microsoft.com/office/drawing/2014/main" id="{AB3D7B47-A61A-3051-B4CB-87B1E30FE814}"/>
+              </a:ext>
+            </a:extLst>
+          </p:cNvPr>
+          <p:cNvSpPr>
+            <a:spLocks noGrp="1"/>
+          </p:cNvSpPr>
+          <p:nvPr>
+            <p:ph idx="1"/>
+          </p:nvPr>
+        </p:nvSpPr>
+        <p:spPr>
+          <a:xfrm>
+            <a:off x="1451579" y="1853754"/>
+            <a:ext cx="9603275" cy="4199727"/>
+          </a:xfrm>
+        </p:spPr>
+        <p:txBody>
+          <a:bodyPr/>
+          <a:lstStyle/>
+          <a:p>
+            <a:r>
+              <a:rPr lang="en-US" dirty="0"/>
+              <a:t>Biggest common issues:</a:t>
+            </a:r>
+          </a:p>
+          <a:p>
+            <a:pPr lvl="1"/>
+            <a:r>
+              <a:rPr lang="en-US" dirty="0"/>
+              <a:t>What should I read from something? I.e. you have some charts, but if I read them, do I actually learn what you intended? </a:t>
+            </a:r>
+          </a:p>
+          <a:p>
+            <a:pPr lvl="1"/>
+            <a:r>
+              <a:rPr lang="en-US" dirty="0"/>
+              <a:t>What does this chart mean? How the value you get from a chart relates to other stuff should be pretty clear. </a:t>
+            </a:r>
+          </a:p>
+          <a:p>
+            <a:r>
+              <a:rPr lang="en-US" dirty="0"/>
+              <a:t>If you think I marked yours incorrectly, make your argument. </a:t>
+            </a:r>
+          </a:p>
+          <a:p>
+            <a:pPr lvl="1"/>
+            <a:r>
+              <a:rPr lang="en-US" dirty="0"/>
+              <a:t>It is </a:t>
+            </a:r>
+            <a:r>
+              <a:rPr lang="en-US" dirty="0" err="1"/>
+              <a:t>inheierently</a:t>
+            </a:r>
+            <a:r>
+              <a:rPr lang="en-US" dirty="0"/>
+              <a:t> a somewhat subjective evaluation, maybe I didn’t get it. </a:t>
+            </a:r>
+          </a:p>
+          <a:p>
+            <a:pPr lvl="1"/>
+            <a:r>
+              <a:rPr lang="en-US" dirty="0"/>
+              <a:t>You have to make a material argument (e.g. mine is better on category X for reasons A, B, and C), you can’t just say “I thought it is good” or “I tried really hard”. </a:t>
+            </a:r>
+          </a:p>
+          <a:p>
+            <a:pPr lvl="1"/>
+            <a:r>
+              <a:rPr lang="en-US" dirty="0"/>
+              <a:t>People win pretty regularly. </a:t>
+            </a:r>
+          </a:p>
+        </p:txBody>
+      </p:sp>
+    </p:spTree>
+    <p:extLst>
+      <p:ext uri="{BB962C8B-B14F-4D97-AF65-F5344CB8AC3E}">
+        <p14:creationId xmlns:p14="http://schemas.microsoft.com/office/powerpoint/2010/main" val="2509522247"/>
+      </p:ext>
+    </p:extLst>
+  </p:cSld>
+  <p:clrMapOvr>
+    <a:masterClrMapping/>
+  </p:clrMapOvr>
+</p:sld>
+</file>
+
+<file path=ppt/slides/slide20.xml><?xml version="1.0" encoding="utf-8"?>
+<p:sld xmlns:a="http://schemas.openxmlformats.org/drawingml/2006/main" xmlns:r="http://schemas.openxmlformats.org/officeDocument/2006/relationships" xmlns:p="http://schemas.openxmlformats.org/presentationml/2006/main">
+  <p:cSld>
+    <p:spTree>
+      <p:nvGrpSpPr>
+        <p:cNvPr id="1" name=""/>
+        <p:cNvGrpSpPr/>
+        <p:nvPr/>
+      </p:nvGrpSpPr>
+      <p:grpSpPr>
+        <a:xfrm>
+          <a:off x="0" y="0"/>
+          <a:ext cx="0" cy="0"/>
+          <a:chOff x="0" y="0"/>
+          <a:chExt cx="0" cy="0"/>
+        </a:xfrm>
+      </p:grpSpPr>
+      <p:sp>
+        <p:nvSpPr>
+          <p:cNvPr id="2" name="Title 1">
+            <a:extLst>
+              <a:ext uri="{FF2B5EF4-FFF2-40B4-BE49-F238E27FC236}">
+                <a16:creationId xmlns:a16="http://schemas.microsoft.com/office/drawing/2014/main" id="{D6BF83D7-616E-3AAC-09E3-52E1E040BB57}"/>
+              </a:ext>
+            </a:extLst>
+          </p:cNvPr>
+          <p:cNvSpPr>
+            <a:spLocks noGrp="1"/>
+          </p:cNvSpPr>
+          <p:nvPr>
+            <p:ph type="title"/>
+          </p:nvPr>
+        </p:nvSpPr>
+        <p:spPr>
+          <a:xfrm>
+            <a:off x="1137147" y="804519"/>
+            <a:ext cx="9917708" cy="1049235"/>
+          </a:xfrm>
+        </p:spPr>
+        <p:txBody>
+          <a:bodyPr/>
+          <a:lstStyle/>
+          <a:p>
+            <a:r>
+              <a:rPr lang="en-US" dirty="0"/>
+              <a:t>Fixed Calculations</a:t>
+            </a:r>
+          </a:p>
+        </p:txBody>
+      </p:sp>
+      <p:sp>
+        <p:nvSpPr>
+          <p:cNvPr id="3" name="Content Placeholder 2">
+            <a:extLst>
+              <a:ext uri="{FF2B5EF4-FFF2-40B4-BE49-F238E27FC236}">
+                <a16:creationId xmlns:a16="http://schemas.microsoft.com/office/drawing/2014/main" id="{5041126C-8B0C-4DA0-A834-31276F94AB2E}"/>
+              </a:ext>
+            </a:extLst>
+          </p:cNvPr>
+          <p:cNvSpPr>
+            <a:spLocks noGrp="1"/>
+          </p:cNvSpPr>
+          <p:nvPr>
+            <p:ph idx="1"/>
+          </p:nvPr>
+        </p:nvSpPr>
+        <p:spPr>
+          <a:xfrm>
+            <a:off x="1451579" y="1853754"/>
+            <a:ext cx="9603275" cy="4199727"/>
+          </a:xfrm>
+        </p:spPr>
+        <p:txBody>
+          <a:bodyPr/>
+          <a:lstStyle/>
+          <a:p>
+            <a:r>
+              <a:rPr lang="en-US" dirty="0"/>
+              <a:t>Fixed allows us to do groupings and aggregations that are fixed. </a:t>
+            </a:r>
+          </a:p>
+          <a:p>
+            <a:r>
+              <a:rPr lang="en-US" dirty="0"/>
+              <a:t>Normally when we add things to Tableau, we have some aggregation and some grouping based on whatever is in the visualization. </a:t>
+            </a:r>
+          </a:p>
+          <a:p>
+            <a:r>
+              <a:rPr lang="en-US" dirty="0"/>
+              <a:t>If we want a calculation based on a grouping that isn’t in the visualization, we have an issue. </a:t>
+            </a:r>
+          </a:p>
+          <a:p>
+            <a:r>
+              <a:rPr lang="en-US" dirty="0"/>
+              <a:t>Fixed defines a specific calculation:</a:t>
+            </a:r>
+          </a:p>
+          <a:p>
+            <a:pPr lvl="1"/>
+            <a:r>
+              <a:rPr lang="en-US" dirty="0"/>
+              <a:t>Create one group for each value in this dimension. </a:t>
+            </a:r>
+          </a:p>
+          <a:p>
+            <a:pPr lvl="1"/>
+            <a:r>
+              <a:rPr lang="en-US" dirty="0"/>
+              <a:t>Generate this aggregation calculation for each of those groups. </a:t>
+            </a:r>
+          </a:p>
+          <a:p>
+            <a:pPr lvl="1"/>
+            <a:r>
+              <a:rPr lang="en-US" dirty="0"/>
+              <a:t>These values are totally unimpacted by the grouping in the visualization. </a:t>
+            </a:r>
+          </a:p>
+        </p:txBody>
+      </p:sp>
+      <p:pic>
+        <p:nvPicPr>
+          <p:cNvPr id="4" name="Picture 3">
+            <a:extLst>
+              <a:ext uri="{FF2B5EF4-FFF2-40B4-BE49-F238E27FC236}">
+                <a16:creationId xmlns:a16="http://schemas.microsoft.com/office/drawing/2014/main" id="{A55C2C24-54A1-4AEA-F68D-852ABAB8CAF8}"/>
+              </a:ext>
+            </a:extLst>
+          </p:cNvPr>
+          <p:cNvPicPr>
+            <a:picLocks noChangeAspect="1"/>
+          </p:cNvPicPr>
+          <p:nvPr/>
+        </p:nvPicPr>
+        <p:blipFill>
+          <a:blip r:embed="rId2"/>
+          <a:stretch>
+            <a:fillRect/>
+          </a:stretch>
+        </p:blipFill>
+        <p:spPr>
+          <a:xfrm>
+            <a:off x="5657930" y="17119"/>
+            <a:ext cx="6534069" cy="1330418"/>
+          </a:xfrm>
+          <a:prstGeom prst="rect">
+            <a:avLst/>
+          </a:prstGeom>
+        </p:spPr>
+      </p:pic>
+    </p:spTree>
+    <p:extLst>
+      <p:ext uri="{BB962C8B-B14F-4D97-AF65-F5344CB8AC3E}">
+        <p14:creationId xmlns:p14="http://schemas.microsoft.com/office/powerpoint/2010/main" val="3179373088"/>
+      </p:ext>
+    </p:extLst>
+  </p:cSld>
+  <p:clrMapOvr>
+    <a:masterClrMapping/>
+  </p:clrMapOvr>
+</p:sld>
+</file>
+
+<file path=ppt/slides/slide21.xml><?xml version="1.0" encoding="utf-8"?>
+<p:sld xmlns:a="http://schemas.openxmlformats.org/drawingml/2006/main" xmlns:r="http://schemas.openxmlformats.org/officeDocument/2006/relationships" xmlns:p="http://schemas.openxmlformats.org/presentationml/2006/main">
+  <p:cSld>
+    <p:spTree>
+      <p:nvGrpSpPr>
+        <p:cNvPr id="1" name=""/>
+        <p:cNvGrpSpPr/>
+        <p:nvPr/>
+      </p:nvGrpSpPr>
+      <p:grpSpPr>
+        <a:xfrm>
+          <a:off x="0" y="0"/>
+          <a:ext cx="0" cy="0"/>
+          <a:chOff x="0" y="0"/>
+          <a:chExt cx="0" cy="0"/>
+        </a:xfrm>
+      </p:grpSpPr>
+      <p:sp>
+        <p:nvSpPr>
+          <p:cNvPr id="2" name="Title 1">
+            <a:extLst>
+              <a:ext uri="{FF2B5EF4-FFF2-40B4-BE49-F238E27FC236}">
+                <a16:creationId xmlns:a16="http://schemas.microsoft.com/office/drawing/2014/main" id="{472EB111-9331-2CF3-1BE2-256D4FE11074}"/>
+              </a:ext>
+            </a:extLst>
+          </p:cNvPr>
+          <p:cNvSpPr>
+            <a:spLocks noGrp="1"/>
+          </p:cNvSpPr>
+          <p:nvPr>
+            <p:ph type="title"/>
+          </p:nvPr>
+        </p:nvSpPr>
+        <p:spPr/>
+        <p:txBody>
+          <a:bodyPr/>
+          <a:lstStyle/>
+          <a:p>
+            <a:r>
+              <a:rPr lang="en-US" dirty="0"/>
+              <a:t>Fixed Usage</a:t>
+            </a:r>
+          </a:p>
+        </p:txBody>
+      </p:sp>
+      <p:sp>
+        <p:nvSpPr>
+          <p:cNvPr id="3" name="Content Placeholder 2">
+            <a:extLst>
+              <a:ext uri="{FF2B5EF4-FFF2-40B4-BE49-F238E27FC236}">
+                <a16:creationId xmlns:a16="http://schemas.microsoft.com/office/drawing/2014/main" id="{7174C5BC-D6D9-034A-4B85-9BAF0DB50F1F}"/>
+              </a:ext>
+            </a:extLst>
+          </p:cNvPr>
+          <p:cNvSpPr>
+            <a:spLocks noGrp="1"/>
+          </p:cNvSpPr>
+          <p:nvPr>
+            <p:ph idx="1"/>
+          </p:nvPr>
+        </p:nvSpPr>
+        <p:spPr>
+          <a:xfrm>
+            <a:off x="300789" y="2015732"/>
+            <a:ext cx="11055070" cy="4037749"/>
+          </a:xfrm>
+        </p:spPr>
+        <p:txBody>
+          <a:bodyPr/>
+          <a:lstStyle/>
+          <a:p>
+            <a:r>
+              <a:rPr lang="en-US" dirty="0"/>
+              <a:t>Fixed can give us something to compare to. </a:t>
+            </a:r>
+          </a:p>
+          <a:p>
+            <a:pPr lvl="1"/>
+            <a:r>
+              <a:rPr lang="en-US" dirty="0"/>
+              <a:t>I.e. we can tabulate the the most votes per riding. </a:t>
+            </a:r>
+          </a:p>
+          <a:p>
+            <a:r>
+              <a:rPr lang="en-US" dirty="0"/>
+              <a:t>E.g. If we want to see who is above or below the average sales per salesperson for each region</a:t>
+            </a:r>
+          </a:p>
+          <a:p>
+            <a:pPr lvl="1"/>
+            <a:r>
+              <a:rPr lang="en-US" dirty="0"/>
+              <a:t>we can define that average using fixed</a:t>
+            </a:r>
+          </a:p>
+          <a:p>
+            <a:pPr lvl="1"/>
+            <a:r>
+              <a:rPr lang="en-US" dirty="0"/>
+              <a:t>that value isn’t impacted by adding or removing data to the visualization. </a:t>
+            </a:r>
+          </a:p>
+          <a:p>
+            <a:pPr lvl="1"/>
+            <a:r>
+              <a:rPr lang="en-US" dirty="0"/>
+              <a:t>We could add/remove individual salespeople from the vis without breaking things. </a:t>
+            </a:r>
+          </a:p>
+          <a:p>
+            <a:r>
+              <a:rPr lang="en-US" dirty="0"/>
+              <a:t>These things are fixed no matter the grouping/splitting of data. </a:t>
+            </a:r>
+          </a:p>
+        </p:txBody>
+      </p:sp>
+      <p:pic>
+        <p:nvPicPr>
+          <p:cNvPr id="4" name="Picture 3">
+            <a:extLst>
+              <a:ext uri="{FF2B5EF4-FFF2-40B4-BE49-F238E27FC236}">
+                <a16:creationId xmlns:a16="http://schemas.microsoft.com/office/drawing/2014/main" id="{C567B9EF-5C02-40B6-D865-CBAAC5D53255}"/>
+              </a:ext>
+            </a:extLst>
+          </p:cNvPr>
+          <p:cNvPicPr>
+            <a:picLocks noChangeAspect="1"/>
+          </p:cNvPicPr>
+          <p:nvPr/>
+        </p:nvPicPr>
+        <p:blipFill>
+          <a:blip r:embed="rId2"/>
+          <a:stretch>
+            <a:fillRect/>
+          </a:stretch>
+        </p:blipFill>
+        <p:spPr>
+          <a:xfrm>
+            <a:off x="5799220" y="0"/>
+            <a:ext cx="6392779" cy="2943917"/>
+          </a:xfrm>
+          <a:prstGeom prst="rect">
+            <a:avLst/>
+          </a:prstGeom>
+        </p:spPr>
+      </p:pic>
+    </p:spTree>
+    <p:extLst>
+      <p:ext uri="{BB962C8B-B14F-4D97-AF65-F5344CB8AC3E}">
+        <p14:creationId xmlns:p14="http://schemas.microsoft.com/office/powerpoint/2010/main" val="2956113032"/>
+      </p:ext>
+    </p:extLst>
+  </p:cSld>
+  <p:clrMapOvr>
+    <a:masterClrMapping/>
+  </p:clrMapOvr>
+</p:sld>
+</file>
+
+<file path=ppt/slides/slide22.xml><?xml version="1.0" encoding="utf-8"?>
+<p:sld xmlns:a="http://schemas.openxmlformats.org/drawingml/2006/main" xmlns:r="http://schemas.openxmlformats.org/officeDocument/2006/relationships" xmlns:p="http://schemas.openxmlformats.org/presentationml/2006/main">
+  <p:cSld>
+    <p:spTree>
+      <p:nvGrpSpPr>
+        <p:cNvPr id="1" name=""/>
+        <p:cNvGrpSpPr/>
+        <p:nvPr/>
+      </p:nvGrpSpPr>
+      <p:grpSpPr>
+        <a:xfrm>
+          <a:off x="0" y="0"/>
+          <a:ext cx="0" cy="0"/>
+          <a:chOff x="0" y="0"/>
+          <a:chExt cx="0" cy="0"/>
+        </a:xfrm>
+      </p:grpSpPr>
+      <p:sp>
+        <p:nvSpPr>
+          <p:cNvPr id="2" name="Title 1">
+            <a:extLst>
+              <a:ext uri="{FF2B5EF4-FFF2-40B4-BE49-F238E27FC236}">
+                <a16:creationId xmlns:a16="http://schemas.microsoft.com/office/drawing/2014/main" id="{C1D588E2-34B9-BE72-DA3B-F940F03661A5}"/>
+              </a:ext>
+            </a:extLst>
+          </p:cNvPr>
+          <p:cNvSpPr>
+            <a:spLocks noGrp="1"/>
+          </p:cNvSpPr>
+          <p:nvPr>
+            <p:ph type="title"/>
+          </p:nvPr>
+        </p:nvSpPr>
+        <p:spPr/>
+        <p:txBody>
+          <a:bodyPr/>
+          <a:lstStyle/>
+          <a:p>
+            <a:r>
+              <a:rPr lang="en-US" dirty="0"/>
+              <a:t>Include/Exclude</a:t>
+            </a:r>
+          </a:p>
+        </p:txBody>
+      </p:sp>
+      <p:sp>
+        <p:nvSpPr>
+          <p:cNvPr id="3" name="Content Placeholder 2">
+            <a:extLst>
+              <a:ext uri="{FF2B5EF4-FFF2-40B4-BE49-F238E27FC236}">
+                <a16:creationId xmlns:a16="http://schemas.microsoft.com/office/drawing/2014/main" id="{207C1D44-8F6C-FB06-27EC-3EA2C7D2ED96}"/>
+              </a:ext>
+            </a:extLst>
+          </p:cNvPr>
+          <p:cNvSpPr>
+            <a:spLocks noGrp="1"/>
+          </p:cNvSpPr>
+          <p:nvPr>
+            <p:ph idx="1"/>
+          </p:nvPr>
+        </p:nvSpPr>
+        <p:spPr>
+          <a:xfrm>
+            <a:off x="1451579" y="2015732"/>
+            <a:ext cx="9603275" cy="4037749"/>
+          </a:xfrm>
+        </p:spPr>
+        <p:txBody>
+          <a:bodyPr/>
+          <a:lstStyle/>
+          <a:p>
+            <a:r>
+              <a:rPr lang="en-US" dirty="0"/>
+              <a:t>Include and exclude are similar-</a:t>
+            </a:r>
+            <a:r>
+              <a:rPr lang="en-US" dirty="0" err="1"/>
+              <a:t>ish</a:t>
+            </a:r>
+            <a:r>
+              <a:rPr lang="en-US" dirty="0"/>
+              <a:t> functions to fixed. </a:t>
+            </a:r>
+          </a:p>
+          <a:p>
+            <a:pPr lvl="1"/>
+            <a:r>
+              <a:rPr lang="en-US" dirty="0"/>
+              <a:t>Include will tell Tableau to aggregate by something. </a:t>
+            </a:r>
+          </a:p>
+          <a:p>
+            <a:pPr lvl="1"/>
+            <a:r>
+              <a:rPr lang="en-US" dirty="0"/>
+              <a:t>Exclude will tell Tableau to not-aggregate by something. </a:t>
+            </a:r>
+          </a:p>
+          <a:p>
+            <a:r>
+              <a:rPr lang="en-US" dirty="0"/>
+              <a:t>Include can force some aggregation in all cases. </a:t>
+            </a:r>
+          </a:p>
+          <a:p>
+            <a:pPr lvl="1"/>
+            <a:r>
+              <a:rPr lang="en-US" dirty="0"/>
+              <a:t>E.g. force something to average differently. </a:t>
+            </a:r>
+          </a:p>
+          <a:p>
+            <a:r>
+              <a:rPr lang="en-US" dirty="0"/>
+              <a:t>Exclude can force something to not be aggregated in all cases. </a:t>
+            </a:r>
+          </a:p>
+          <a:p>
+            <a:pPr lvl="1"/>
+            <a:r>
+              <a:rPr lang="en-US" dirty="0"/>
+              <a:t>Exclude some value from being aggregated by specific values. </a:t>
+            </a:r>
+          </a:p>
+          <a:p>
+            <a:r>
+              <a:rPr lang="en-US" dirty="0"/>
+              <a:t>I find these more confusing vs just using fixed, but that’s just me. </a:t>
+            </a:r>
+          </a:p>
+        </p:txBody>
+      </p:sp>
+    </p:spTree>
+    <p:extLst>
+      <p:ext uri="{BB962C8B-B14F-4D97-AF65-F5344CB8AC3E}">
+        <p14:creationId xmlns:p14="http://schemas.microsoft.com/office/powerpoint/2010/main" val="2318927698"/>
+      </p:ext>
+    </p:extLst>
+  </p:cSld>
+  <p:clrMapOvr>
+    <a:masterClrMapping/>
+  </p:clrMapOvr>
+</p:sld>
+</file>
+
+<file path=ppt/slides/slide23.xml><?xml version="1.0" encoding="utf-8"?>
+<p:sld xmlns:a="http://schemas.openxmlformats.org/drawingml/2006/main" xmlns:r="http://schemas.openxmlformats.org/officeDocument/2006/relationships" xmlns:p="http://schemas.openxmlformats.org/presentationml/2006/main">
+  <p:cSld>
+    <p:spTree>
+      <p:nvGrpSpPr>
+        <p:cNvPr id="1" name=""/>
+        <p:cNvGrpSpPr/>
+        <p:nvPr/>
+      </p:nvGrpSpPr>
+      <p:grpSpPr>
+        <a:xfrm>
+          <a:off x="0" y="0"/>
+          <a:ext cx="0" cy="0"/>
+          <a:chOff x="0" y="0"/>
+          <a:chExt cx="0" cy="0"/>
+        </a:xfrm>
+      </p:grpSpPr>
+      <p:sp>
+        <p:nvSpPr>
+          <p:cNvPr id="2" name="Title 1">
+            <a:extLst>
+              <a:ext uri="{FF2B5EF4-FFF2-40B4-BE49-F238E27FC236}">
                 <a16:creationId xmlns:a16="http://schemas.microsoft.com/office/drawing/2014/main" id="{9A8EAB25-0E25-D880-FD7B-C43373E5B6A0}"/>
               </a:ext>
             </a:extLst>
@@ -5252,90 +5939,7 @@
 </p:sld>
 </file>
 
-<file path=ppt/slides/slide2.xml><?xml version="1.0" encoding="utf-8"?>
-<p:sld xmlns:a="http://schemas.openxmlformats.org/drawingml/2006/main" xmlns:r="http://schemas.openxmlformats.org/officeDocument/2006/relationships" xmlns:p="http://schemas.openxmlformats.org/presentationml/2006/main">
-  <p:cSld>
-    <p:spTree>
-      <p:nvGrpSpPr>
-        <p:cNvPr id="1" name=""/>
-        <p:cNvGrpSpPr/>
-        <p:nvPr/>
-      </p:nvGrpSpPr>
-      <p:grpSpPr>
-        <a:xfrm>
-          <a:off x="0" y="0"/>
-          <a:ext cx="0" cy="0"/>
-          <a:chOff x="0" y="0"/>
-          <a:chExt cx="0" cy="0"/>
-        </a:xfrm>
-      </p:grpSpPr>
-      <p:sp>
-        <p:nvSpPr>
-          <p:cNvPr id="2" name="Title 1">
-            <a:extLst>
-              <a:ext uri="{FF2B5EF4-FFF2-40B4-BE49-F238E27FC236}">
-                <a16:creationId xmlns:a16="http://schemas.microsoft.com/office/drawing/2014/main" id="{17D29EE3-FBDD-3098-976F-2DFEBA21245E}"/>
-              </a:ext>
-            </a:extLst>
-          </p:cNvPr>
-          <p:cNvSpPr>
-            <a:spLocks noGrp="1"/>
-          </p:cNvSpPr>
-          <p:nvPr>
-            <p:ph type="ctrTitle"/>
-          </p:nvPr>
-        </p:nvSpPr>
-        <p:spPr/>
-        <p:txBody>
-          <a:bodyPr/>
-          <a:lstStyle/>
-          <a:p>
-            <a:r>
-              <a:rPr lang="en-US" dirty="0"/>
-              <a:t>Spatial Data and LOD Calculations</a:t>
-            </a:r>
-          </a:p>
-        </p:txBody>
-      </p:sp>
-      <p:sp>
-        <p:nvSpPr>
-          <p:cNvPr id="3" name="Subtitle 2">
-            <a:extLst>
-              <a:ext uri="{FF2B5EF4-FFF2-40B4-BE49-F238E27FC236}">
-                <a16:creationId xmlns:a16="http://schemas.microsoft.com/office/drawing/2014/main" id="{FE6B59C9-457D-4BC3-E6E2-764CEC272EFF}"/>
-              </a:ext>
-            </a:extLst>
-          </p:cNvPr>
-          <p:cNvSpPr>
-            <a:spLocks noGrp="1"/>
-          </p:cNvSpPr>
-          <p:nvPr>
-            <p:ph type="subTitle" idx="1"/>
-          </p:nvPr>
-        </p:nvSpPr>
-        <p:spPr/>
-        <p:txBody>
-          <a:bodyPr/>
-          <a:lstStyle/>
-          <a:p>
-            <a:endParaRPr lang="en-US"/>
-          </a:p>
-        </p:txBody>
-      </p:sp>
-    </p:spTree>
-    <p:extLst>
-      <p:ext uri="{BB962C8B-B14F-4D97-AF65-F5344CB8AC3E}">
-        <p14:creationId xmlns:p14="http://schemas.microsoft.com/office/powerpoint/2010/main" val="1040830714"/>
-      </p:ext>
-    </p:extLst>
-  </p:cSld>
-  <p:clrMapOvr>
-    <a:masterClrMapping/>
-  </p:clrMapOvr>
-</p:sld>
-</file>
-
-<file path=ppt/slides/slide20.xml><?xml version="1.0" encoding="utf-8"?>
+<file path=ppt/slides/slide24.xml><?xml version="1.0" encoding="utf-8"?>
 <p:sld xmlns:a="http://schemas.openxmlformats.org/drawingml/2006/main" xmlns:r="http://schemas.openxmlformats.org/officeDocument/2006/relationships" xmlns:p="http://schemas.openxmlformats.org/presentationml/2006/main">
   <p:cSld>
     <p:spTree>
@@ -5482,7 +6086,7 @@
 </p:sld>
 </file>
 
-<file path=ppt/slides/slide21.xml><?xml version="1.0" encoding="utf-8"?>
+<file path=ppt/slides/slide25.xml><?xml version="1.0" encoding="utf-8"?>
 <p:sld xmlns:a="http://schemas.openxmlformats.org/drawingml/2006/main" xmlns:r="http://schemas.openxmlformats.org/officeDocument/2006/relationships" xmlns:p="http://schemas.openxmlformats.org/presentationml/2006/main">
   <p:cSld>
     <p:spTree>
@@ -5589,7 +6193,7 @@
 </p:sld>
 </file>
 
-<file path=ppt/slides/slide22.xml><?xml version="1.0" encoding="utf-8"?>
+<file path=ppt/slides/slide26.xml><?xml version="1.0" encoding="utf-8"?>
 <p:sld xmlns:a="http://schemas.openxmlformats.org/drawingml/2006/main" xmlns:r="http://schemas.openxmlformats.org/officeDocument/2006/relationships" xmlns:p="http://schemas.openxmlformats.org/presentationml/2006/main">
   <p:cSld>
     <p:spTree>
@@ -5747,7 +6351,7 @@
 </p:sld>
 </file>
 
-<file path=ppt/slides/slide23.xml><?xml version="1.0" encoding="utf-8"?>
+<file path=ppt/slides/slide27.xml><?xml version="1.0" encoding="utf-8"?>
 <p:sld xmlns:a="http://schemas.openxmlformats.org/drawingml/2006/main" xmlns:r="http://schemas.openxmlformats.org/officeDocument/2006/relationships" xmlns:p="http://schemas.openxmlformats.org/presentationml/2006/main" show="0">
   <p:cSld>
     <p:spTree>
@@ -5889,6 +6493,89 @@
           <p:cNvPr id="2" name="Title 1">
             <a:extLst>
               <a:ext uri="{FF2B5EF4-FFF2-40B4-BE49-F238E27FC236}">
+                <a16:creationId xmlns:a16="http://schemas.microsoft.com/office/drawing/2014/main" id="{17D29EE3-FBDD-3098-976F-2DFEBA21245E}"/>
+              </a:ext>
+            </a:extLst>
+          </p:cNvPr>
+          <p:cNvSpPr>
+            <a:spLocks noGrp="1"/>
+          </p:cNvSpPr>
+          <p:nvPr>
+            <p:ph type="ctrTitle"/>
+          </p:nvPr>
+        </p:nvSpPr>
+        <p:spPr/>
+        <p:txBody>
+          <a:bodyPr/>
+          <a:lstStyle/>
+          <a:p>
+            <a:r>
+              <a:rPr lang="en-US" dirty="0"/>
+              <a:t>Spatial Data and LOD Calculations</a:t>
+            </a:r>
+          </a:p>
+        </p:txBody>
+      </p:sp>
+      <p:sp>
+        <p:nvSpPr>
+          <p:cNvPr id="3" name="Subtitle 2">
+            <a:extLst>
+              <a:ext uri="{FF2B5EF4-FFF2-40B4-BE49-F238E27FC236}">
+                <a16:creationId xmlns:a16="http://schemas.microsoft.com/office/drawing/2014/main" id="{FE6B59C9-457D-4BC3-E6E2-764CEC272EFF}"/>
+              </a:ext>
+            </a:extLst>
+          </p:cNvPr>
+          <p:cNvSpPr>
+            <a:spLocks noGrp="1"/>
+          </p:cNvSpPr>
+          <p:nvPr>
+            <p:ph type="subTitle" idx="1"/>
+          </p:nvPr>
+        </p:nvSpPr>
+        <p:spPr/>
+        <p:txBody>
+          <a:bodyPr/>
+          <a:lstStyle/>
+          <a:p>
+            <a:endParaRPr lang="en-US"/>
+          </a:p>
+        </p:txBody>
+      </p:sp>
+    </p:spTree>
+    <p:extLst>
+      <p:ext uri="{BB962C8B-B14F-4D97-AF65-F5344CB8AC3E}">
+        <p14:creationId xmlns:p14="http://schemas.microsoft.com/office/powerpoint/2010/main" val="1040830714"/>
+      </p:ext>
+    </p:extLst>
+  </p:cSld>
+  <p:clrMapOvr>
+    <a:masterClrMapping/>
+  </p:clrMapOvr>
+</p:sld>
+</file>
+
+<file path=ppt/slides/slide4.xml><?xml version="1.0" encoding="utf-8"?>
+<p:sld xmlns:a="http://schemas.openxmlformats.org/drawingml/2006/main" xmlns:r="http://schemas.openxmlformats.org/officeDocument/2006/relationships" xmlns:p="http://schemas.openxmlformats.org/presentationml/2006/main">
+  <p:cSld>
+    <p:spTree>
+      <p:nvGrpSpPr>
+        <p:cNvPr id="1" name=""/>
+        <p:cNvGrpSpPr/>
+        <p:nvPr/>
+      </p:nvGrpSpPr>
+      <p:grpSpPr>
+        <a:xfrm>
+          <a:off x="0" y="0"/>
+          <a:ext cx="0" cy="0"/>
+          <a:chOff x="0" y="0"/>
+          <a:chExt cx="0" cy="0"/>
+        </a:xfrm>
+      </p:grpSpPr>
+      <p:sp>
+        <p:nvSpPr>
+          <p:cNvPr id="2" name="Title 1">
+            <a:extLst>
+              <a:ext uri="{FF2B5EF4-FFF2-40B4-BE49-F238E27FC236}">
                 <a16:creationId xmlns:a16="http://schemas.microsoft.com/office/drawing/2014/main" id="{14754060-0773-9224-1FD9-CEBDB96621B1}"/>
               </a:ext>
             </a:extLst>
@@ -6010,7 +6697,7 @@
 </p:sld>
 </file>
 
-<file path=ppt/slides/slide4.xml><?xml version="1.0" encoding="utf-8"?>
+<file path=ppt/slides/slide5.xml><?xml version="1.0" encoding="utf-8"?>
 <p:sld xmlns:a="http://schemas.openxmlformats.org/drawingml/2006/main" xmlns:r="http://schemas.openxmlformats.org/officeDocument/2006/relationships" xmlns:p="http://schemas.openxmlformats.org/presentationml/2006/main">
   <p:cSld>
     <p:bg>
@@ -6270,155 +6957,6 @@
 </p:sld>
 </file>
 
-<file path=ppt/slides/slide5.xml><?xml version="1.0" encoding="utf-8"?>
-<p:sld xmlns:a="http://schemas.openxmlformats.org/drawingml/2006/main" xmlns:r="http://schemas.openxmlformats.org/officeDocument/2006/relationships" xmlns:p="http://schemas.openxmlformats.org/presentationml/2006/main">
-  <p:cSld>
-    <p:spTree>
-      <p:nvGrpSpPr>
-        <p:cNvPr id="1" name=""/>
-        <p:cNvGrpSpPr/>
-        <p:nvPr/>
-      </p:nvGrpSpPr>
-      <p:grpSpPr>
-        <a:xfrm>
-          <a:off x="0" y="0"/>
-          <a:ext cx="0" cy="0"/>
-          <a:chOff x="0" y="0"/>
-          <a:chExt cx="0" cy="0"/>
-        </a:xfrm>
-      </p:grpSpPr>
-      <p:sp>
-        <p:nvSpPr>
-          <p:cNvPr id="2" name="Title 1">
-            <a:extLst>
-              <a:ext uri="{FF2B5EF4-FFF2-40B4-BE49-F238E27FC236}">
-                <a16:creationId xmlns:a16="http://schemas.microsoft.com/office/drawing/2014/main" id="{836F5D82-1D96-442C-76C5-D6B55C7772E6}"/>
-              </a:ext>
-            </a:extLst>
-          </p:cNvPr>
-          <p:cNvSpPr>
-            <a:spLocks noGrp="1"/>
-          </p:cNvSpPr>
-          <p:nvPr>
-            <p:ph type="title"/>
-          </p:nvPr>
-        </p:nvSpPr>
-        <p:spPr/>
-        <p:txBody>
-          <a:bodyPr/>
-          <a:lstStyle/>
-          <a:p>
-            <a:r>
-              <a:rPr lang="en-US" dirty="0"/>
-              <a:t>Adding Spatial Data</a:t>
-            </a:r>
-          </a:p>
-        </p:txBody>
-      </p:sp>
-      <p:sp>
-        <p:nvSpPr>
-          <p:cNvPr id="3" name="Content Placeholder 2">
-            <a:extLst>
-              <a:ext uri="{FF2B5EF4-FFF2-40B4-BE49-F238E27FC236}">
-                <a16:creationId xmlns:a16="http://schemas.microsoft.com/office/drawing/2014/main" id="{D176D622-4986-7741-CA3B-7B7DAF1E01C3}"/>
-              </a:ext>
-            </a:extLst>
-          </p:cNvPr>
-          <p:cNvSpPr>
-            <a:spLocks noGrp="1"/>
-          </p:cNvSpPr>
-          <p:nvPr>
-            <p:ph idx="1"/>
-          </p:nvPr>
-        </p:nvSpPr>
-        <p:spPr>
-          <a:xfrm>
-            <a:off x="1451579" y="2015732"/>
-            <a:ext cx="9603275" cy="4037749"/>
-          </a:xfrm>
-        </p:spPr>
-        <p:txBody>
-          <a:bodyPr>
-            <a:normAutofit lnSpcReduction="10000"/>
-          </a:bodyPr>
-          <a:lstStyle/>
-          <a:p>
-            <a:r>
-              <a:rPr lang="en-US" dirty="0"/>
-              <a:t>Once the spatial file is joined and loaded, we can use the geometry like any other region field in Tableau, such as Country or State. </a:t>
-            </a:r>
-          </a:p>
-          <a:p>
-            <a:pPr lvl="1"/>
-            <a:r>
-              <a:rPr lang="en-US" dirty="0"/>
-              <a:t>The things where we can build filled maps without doing anything special (country, state, province) have these spatial boundaries defined internally, because they’re so common. </a:t>
-            </a:r>
-          </a:p>
-          <a:p>
-            <a:pPr lvl="1"/>
-            <a:r>
-              <a:rPr lang="en-US" dirty="0"/>
-              <a:t>This process is still happening, it is just seamless to us. </a:t>
-            </a:r>
-          </a:p>
-          <a:p>
-            <a:r>
-              <a:rPr lang="en-US" dirty="0"/>
-              <a:t>We can make filled maps of whatever regions the spatial file defines. </a:t>
-            </a:r>
-          </a:p>
-          <a:p>
-            <a:r>
-              <a:rPr lang="en-US" dirty="0"/>
-              <a:t>The end result of the join is that the data now has an attribute that defines, on a map, where that region lies. </a:t>
-            </a:r>
-          </a:p>
-          <a:p>
-            <a:r>
-              <a:rPr lang="en-US" dirty="0"/>
-              <a:t>For “public” things like neighborhoods, regions, </a:t>
-            </a:r>
-            <a:r>
-              <a:rPr lang="en-US" dirty="0" err="1"/>
-              <a:t>etc</a:t>
-            </a:r>
-            <a:r>
-              <a:rPr lang="en-US" dirty="0"/>
-              <a:t>… searching “WHAT_I_WANT </a:t>
-            </a:r>
-            <a:r>
-              <a:rPr lang="en-US" dirty="0" err="1"/>
-              <a:t>kml</a:t>
-            </a:r>
-            <a:r>
-              <a:rPr lang="en-US" dirty="0"/>
-              <a:t>” or “WHAT_I_WANT </a:t>
-            </a:r>
-            <a:r>
-              <a:rPr lang="en-US" dirty="0" err="1"/>
-              <a:t>shp</a:t>
-            </a:r>
-            <a:r>
-              <a:rPr lang="en-US" dirty="0"/>
-              <a:t>” will likely find a result. </a:t>
-            </a:r>
-          </a:p>
-        </p:txBody>
-      </p:sp>
-    </p:spTree>
-    <p:extLst>
-      <p:ext uri="{BB962C8B-B14F-4D97-AF65-F5344CB8AC3E}">
-        <p14:creationId xmlns:p14="http://schemas.microsoft.com/office/powerpoint/2010/main" val="234162222"/>
-      </p:ext>
-    </p:extLst>
-  </p:cSld>
-  <p:clrMapOvr>
-    <a:masterClrMapping/>
-  </p:clrMapOvr>
-</p:sld>
-</file>
-
 <file path=ppt/slides/slide6.xml><?xml version="1.0" encoding="utf-8"?>
 <p:sld xmlns:a="http://schemas.openxmlformats.org/drawingml/2006/main" xmlns:r="http://schemas.openxmlformats.org/officeDocument/2006/relationships" xmlns:p="http://schemas.openxmlformats.org/presentationml/2006/main">
   <p:cSld>
@@ -6441,6 +6979,155 @@
           <p:cNvPr id="2" name="Title 1">
             <a:extLst>
               <a:ext uri="{FF2B5EF4-FFF2-40B4-BE49-F238E27FC236}">
+                <a16:creationId xmlns:a16="http://schemas.microsoft.com/office/drawing/2014/main" id="{836F5D82-1D96-442C-76C5-D6B55C7772E6}"/>
+              </a:ext>
+            </a:extLst>
+          </p:cNvPr>
+          <p:cNvSpPr>
+            <a:spLocks noGrp="1"/>
+          </p:cNvSpPr>
+          <p:nvPr>
+            <p:ph type="title"/>
+          </p:nvPr>
+        </p:nvSpPr>
+        <p:spPr/>
+        <p:txBody>
+          <a:bodyPr/>
+          <a:lstStyle/>
+          <a:p>
+            <a:r>
+              <a:rPr lang="en-US" dirty="0"/>
+              <a:t>Adding Spatial Data</a:t>
+            </a:r>
+          </a:p>
+        </p:txBody>
+      </p:sp>
+      <p:sp>
+        <p:nvSpPr>
+          <p:cNvPr id="3" name="Content Placeholder 2">
+            <a:extLst>
+              <a:ext uri="{FF2B5EF4-FFF2-40B4-BE49-F238E27FC236}">
+                <a16:creationId xmlns:a16="http://schemas.microsoft.com/office/drawing/2014/main" id="{D176D622-4986-7741-CA3B-7B7DAF1E01C3}"/>
+              </a:ext>
+            </a:extLst>
+          </p:cNvPr>
+          <p:cNvSpPr>
+            <a:spLocks noGrp="1"/>
+          </p:cNvSpPr>
+          <p:nvPr>
+            <p:ph idx="1"/>
+          </p:nvPr>
+        </p:nvSpPr>
+        <p:spPr>
+          <a:xfrm>
+            <a:off x="1451579" y="2015732"/>
+            <a:ext cx="9603275" cy="4037749"/>
+          </a:xfrm>
+        </p:spPr>
+        <p:txBody>
+          <a:bodyPr>
+            <a:normAutofit lnSpcReduction="10000"/>
+          </a:bodyPr>
+          <a:lstStyle/>
+          <a:p>
+            <a:r>
+              <a:rPr lang="en-US" dirty="0"/>
+              <a:t>Once the spatial file is joined and loaded, we can use the geometry like any other region field in Tableau, such as Country or State. </a:t>
+            </a:r>
+          </a:p>
+          <a:p>
+            <a:pPr lvl="1"/>
+            <a:r>
+              <a:rPr lang="en-US" dirty="0"/>
+              <a:t>The things where we can build filled maps without doing anything special (country, state, province) have these spatial boundaries defined internally, because they’re so common. </a:t>
+            </a:r>
+          </a:p>
+          <a:p>
+            <a:pPr lvl="1"/>
+            <a:r>
+              <a:rPr lang="en-US" dirty="0"/>
+              <a:t>This process is still happening, it is just seamless to us. </a:t>
+            </a:r>
+          </a:p>
+          <a:p>
+            <a:r>
+              <a:rPr lang="en-US" dirty="0"/>
+              <a:t>We can make filled maps of whatever regions the spatial file defines. </a:t>
+            </a:r>
+          </a:p>
+          <a:p>
+            <a:r>
+              <a:rPr lang="en-US" dirty="0"/>
+              <a:t>The end result of the join is that the data now has an attribute that defines, on a map, where that region lies. </a:t>
+            </a:r>
+          </a:p>
+          <a:p>
+            <a:r>
+              <a:rPr lang="en-US" dirty="0"/>
+              <a:t>For “public” things like neighborhoods, regions, </a:t>
+            </a:r>
+            <a:r>
+              <a:rPr lang="en-US" dirty="0" err="1"/>
+              <a:t>etc</a:t>
+            </a:r>
+            <a:r>
+              <a:rPr lang="en-US" dirty="0"/>
+              <a:t>… searching “WHAT_I_WANT </a:t>
+            </a:r>
+            <a:r>
+              <a:rPr lang="en-US" dirty="0" err="1"/>
+              <a:t>kml</a:t>
+            </a:r>
+            <a:r>
+              <a:rPr lang="en-US" dirty="0"/>
+              <a:t>” or “WHAT_I_WANT </a:t>
+            </a:r>
+            <a:r>
+              <a:rPr lang="en-US" dirty="0" err="1"/>
+              <a:t>shp</a:t>
+            </a:r>
+            <a:r>
+              <a:rPr lang="en-US" dirty="0"/>
+              <a:t>” will likely find a result. </a:t>
+            </a:r>
+          </a:p>
+        </p:txBody>
+      </p:sp>
+    </p:spTree>
+    <p:extLst>
+      <p:ext uri="{BB962C8B-B14F-4D97-AF65-F5344CB8AC3E}">
+        <p14:creationId xmlns:p14="http://schemas.microsoft.com/office/powerpoint/2010/main" val="234162222"/>
+      </p:ext>
+    </p:extLst>
+  </p:cSld>
+  <p:clrMapOvr>
+    <a:masterClrMapping/>
+  </p:clrMapOvr>
+</p:sld>
+</file>
+
+<file path=ppt/slides/slide7.xml><?xml version="1.0" encoding="utf-8"?>
+<p:sld xmlns:a="http://schemas.openxmlformats.org/drawingml/2006/main" xmlns:r="http://schemas.openxmlformats.org/officeDocument/2006/relationships" xmlns:p="http://schemas.openxmlformats.org/presentationml/2006/main">
+  <p:cSld>
+    <p:spTree>
+      <p:nvGrpSpPr>
+        <p:cNvPr id="1" name=""/>
+        <p:cNvGrpSpPr/>
+        <p:nvPr/>
+      </p:nvGrpSpPr>
+      <p:grpSpPr>
+        <a:xfrm>
+          <a:off x="0" y="0"/>
+          <a:ext cx="0" cy="0"/>
+          <a:chOff x="0" y="0"/>
+          <a:chExt cx="0" cy="0"/>
+        </a:xfrm>
+      </p:grpSpPr>
+      <p:sp>
+        <p:nvSpPr>
+          <p:cNvPr id="2" name="Title 1">
+            <a:extLst>
+              <a:ext uri="{FF2B5EF4-FFF2-40B4-BE49-F238E27FC236}">
                 <a16:creationId xmlns:a16="http://schemas.microsoft.com/office/drawing/2014/main" id="{F499F1B4-47F6-2A6E-CB11-DEF1E64ACF57}"/>
               </a:ext>
             </a:extLst>
@@ -6543,7 +7230,7 @@
 </p:sld>
 </file>
 
-<file path=ppt/slides/slide7.xml><?xml version="1.0" encoding="utf-8"?>
+<file path=ppt/slides/slide8.xml><?xml version="1.0" encoding="utf-8"?>
 <p:sld xmlns:a="http://schemas.openxmlformats.org/drawingml/2006/main" xmlns:r="http://schemas.openxmlformats.org/officeDocument/2006/relationships" xmlns:p="http://schemas.openxmlformats.org/presentationml/2006/main">
   <p:cSld>
     <p:spTree>
@@ -6673,130 +7360,6 @@
 </p:sld>
 </file>
 
-<file path=ppt/slides/slide8.xml><?xml version="1.0" encoding="utf-8"?>
-<p:sld xmlns:a="http://schemas.openxmlformats.org/drawingml/2006/main" xmlns:r="http://schemas.openxmlformats.org/officeDocument/2006/relationships" xmlns:p="http://schemas.openxmlformats.org/presentationml/2006/main">
-  <p:cSld>
-    <p:spTree>
-      <p:nvGrpSpPr>
-        <p:cNvPr id="1" name=""/>
-        <p:cNvGrpSpPr/>
-        <p:nvPr/>
-      </p:nvGrpSpPr>
-      <p:grpSpPr>
-        <a:xfrm>
-          <a:off x="0" y="0"/>
-          <a:ext cx="0" cy="0"/>
-          <a:chOff x="0" y="0"/>
-          <a:chExt cx="0" cy="0"/>
-        </a:xfrm>
-      </p:grpSpPr>
-      <p:sp>
-        <p:nvSpPr>
-          <p:cNvPr id="2" name="Title 1">
-            <a:extLst>
-              <a:ext uri="{FF2B5EF4-FFF2-40B4-BE49-F238E27FC236}">
-                <a16:creationId xmlns:a16="http://schemas.microsoft.com/office/drawing/2014/main" id="{18036F54-37EA-17A1-59E1-DA614F1B7358}"/>
-              </a:ext>
-            </a:extLst>
-          </p:cNvPr>
-          <p:cNvSpPr>
-            <a:spLocks noGrp="1"/>
-          </p:cNvSpPr>
-          <p:nvPr>
-            <p:ph type="title"/>
-          </p:nvPr>
-        </p:nvSpPr>
-        <p:spPr/>
-        <p:txBody>
-          <a:bodyPr/>
-          <a:lstStyle/>
-          <a:p>
-            <a:r>
-              <a:rPr lang="en-US" dirty="0"/>
-              <a:t>Spatial Areas</a:t>
-            </a:r>
-          </a:p>
-        </p:txBody>
-      </p:sp>
-      <p:sp>
-        <p:nvSpPr>
-          <p:cNvPr id="3" name="Content Placeholder 2">
-            <a:extLst>
-              <a:ext uri="{FF2B5EF4-FFF2-40B4-BE49-F238E27FC236}">
-                <a16:creationId xmlns:a16="http://schemas.microsoft.com/office/drawing/2014/main" id="{A7F547B6-2AA3-6F1F-790C-B716F8E61852}"/>
-              </a:ext>
-            </a:extLst>
-          </p:cNvPr>
-          <p:cNvSpPr>
-            <a:spLocks noGrp="1"/>
-          </p:cNvSpPr>
-          <p:nvPr>
-            <p:ph idx="1"/>
-          </p:nvPr>
-        </p:nvSpPr>
-        <p:spPr>
-          <a:xfrm>
-            <a:off x="1451579" y="1853754"/>
-            <a:ext cx="9603275" cy="4199727"/>
-          </a:xfrm>
-        </p:spPr>
-        <p:txBody>
-          <a:bodyPr/>
-          <a:lstStyle/>
-          <a:p>
-            <a:r>
-              <a:rPr lang="en-US" dirty="0"/>
-              <a:t>The geometry field is basically the outline of some region or space on a map. </a:t>
-            </a:r>
-          </a:p>
-          <a:p>
-            <a:r>
-              <a:rPr lang="en-US" dirty="0"/>
-              <a:t>Once we have the areas defined, we can easily calculate with them:</a:t>
-            </a:r>
-          </a:p>
-          <a:p>
-            <a:pPr lvl="1"/>
-            <a:r>
-              <a:rPr lang="en-US" dirty="0"/>
-              <a:t>Is there intersection of two areas?</a:t>
-            </a:r>
-          </a:p>
-          <a:p>
-            <a:pPr lvl="1"/>
-            <a:r>
-              <a:rPr lang="en-US" dirty="0"/>
-              <a:t>Is a point in an area? </a:t>
-            </a:r>
-          </a:p>
-          <a:p>
-            <a:pPr lvl="1"/>
-            <a:r>
-              <a:rPr lang="en-US" dirty="0"/>
-              <a:t>How large is an area? </a:t>
-            </a:r>
-          </a:p>
-          <a:p>
-            <a:r>
-              <a:rPr lang="en-US" dirty="0"/>
-              <a:t>These geometry attributes can be mapped just like state/country in Tableau. </a:t>
-            </a:r>
-          </a:p>
-        </p:txBody>
-      </p:sp>
-    </p:spTree>
-    <p:extLst>
-      <p:ext uri="{BB962C8B-B14F-4D97-AF65-F5344CB8AC3E}">
-        <p14:creationId xmlns:p14="http://schemas.microsoft.com/office/powerpoint/2010/main" val="4068685130"/>
-      </p:ext>
-    </p:extLst>
-  </p:cSld>
-  <p:clrMapOvr>
-    <a:masterClrMapping/>
-  </p:clrMapOvr>
-</p:sld>
-</file>
-
 <file path=ppt/slides/slide9.xml><?xml version="1.0" encoding="utf-8"?>
 <p:sld xmlns:a="http://schemas.openxmlformats.org/drawingml/2006/main" xmlns:r="http://schemas.openxmlformats.org/officeDocument/2006/relationships" xmlns:p="http://schemas.openxmlformats.org/presentationml/2006/main">
   <p:cSld>
@@ -6819,7 +7382,7 @@
           <p:cNvPr id="2" name="Title 1">
             <a:extLst>
               <a:ext uri="{FF2B5EF4-FFF2-40B4-BE49-F238E27FC236}">
-                <a16:creationId xmlns:a16="http://schemas.microsoft.com/office/drawing/2014/main" id="{69A847B1-0536-11E7-7CBE-A68404B71582}"/>
+                <a16:creationId xmlns:a16="http://schemas.microsoft.com/office/drawing/2014/main" id="{18036F54-37EA-17A1-59E1-DA614F1B7358}"/>
               </a:ext>
             </a:extLst>
           </p:cNvPr>
@@ -6837,7 +7400,7 @@
           <a:p>
             <a:r>
               <a:rPr lang="en-US" dirty="0"/>
-              <a:t>Points</a:t>
+              <a:t>Spatial Areas</a:t>
             </a:r>
           </a:p>
         </p:txBody>
@@ -6847,7 +7410,7 @@
           <p:cNvPr id="3" name="Content Placeholder 2">
             <a:extLst>
               <a:ext uri="{FF2B5EF4-FFF2-40B4-BE49-F238E27FC236}">
-                <a16:creationId xmlns:a16="http://schemas.microsoft.com/office/drawing/2014/main" id="{CC29031A-00D2-22B4-EE1A-7F9A5C362507}"/>
+                <a16:creationId xmlns:a16="http://schemas.microsoft.com/office/drawing/2014/main" id="{A7F547B6-2AA3-6F1F-790C-B716F8E61852}"/>
               </a:ext>
             </a:extLst>
           </p:cNvPr>
@@ -6860,8 +7423,8 @@
         </p:nvSpPr>
         <p:spPr>
           <a:xfrm>
-            <a:off x="1451579" y="2015732"/>
-            <a:ext cx="9603275" cy="4037749"/>
+            <a:off x="1451579" y="1853754"/>
+            <a:ext cx="9603275" cy="4199727"/>
           </a:xfrm>
         </p:spPr>
         <p:txBody>
@@ -6870,74 +7433,40 @@
           <a:p>
             <a:r>
               <a:rPr lang="en-US" dirty="0"/>
-              <a:t>Points in spatial data are, well… points on a map. </a:t>
-            </a:r>
-          </a:p>
-          <a:p>
-            <a:r>
-              <a:rPr lang="en-US" dirty="0"/>
-              <a:t>Points are a special datatype that are constructed from </a:t>
-            </a:r>
-            <a:r>
-              <a:rPr lang="en-US" dirty="0" err="1"/>
-              <a:t>lat</a:t>
-            </a:r>
-            <a:r>
-              <a:rPr lang="en-US" dirty="0"/>
-              <a:t>/</a:t>
-            </a:r>
-            <a:r>
-              <a:rPr lang="en-US" dirty="0" err="1"/>
-              <a:t>lon</a:t>
-            </a:r>
-            <a:r>
-              <a:rPr lang="en-US" dirty="0"/>
-              <a:t>:</a:t>
+              <a:t>The geometry field is basically the outline of some region or space on a map. </a:t>
+            </a:r>
+          </a:p>
+          <a:p>
+            <a:r>
+              <a:rPr lang="en-US" dirty="0"/>
+              <a:t>Once we have the areas defined, we can easily calculate with them:</a:t>
             </a:r>
           </a:p>
           <a:p>
             <a:pPr lvl="1"/>
             <a:r>
               <a:rPr lang="en-US" dirty="0"/>
-              <a:t>We can make a point with the </a:t>
-            </a:r>
-            <a:r>
-              <a:rPr lang="en-US" dirty="0" err="1"/>
-              <a:t>Makepoint</a:t>
-            </a:r>
-            <a:r>
-              <a:rPr lang="en-US" dirty="0"/>
-              <a:t> function if we have latitude and longitude. </a:t>
+              <a:t>Is there intersection of two areas?</a:t>
             </a:r>
           </a:p>
           <a:p>
             <a:pPr lvl="1"/>
             <a:r>
               <a:rPr lang="en-US" dirty="0"/>
-              <a:t>The point data type is basically </a:t>
-            </a:r>
-            <a:r>
-              <a:rPr lang="en-US" dirty="0" err="1"/>
-              <a:t>lat</a:t>
-            </a:r>
-            <a:r>
-              <a:rPr lang="en-US" dirty="0"/>
-              <a:t>/</a:t>
-            </a:r>
-            <a:r>
-              <a:rPr lang="en-US" dirty="0" err="1"/>
-              <a:t>lon</a:t>
-            </a:r>
-            <a:r>
-              <a:rPr lang="en-US" dirty="0"/>
-              <a:t> + a ”type” that we don’t care about. </a:t>
+              <a:t>Is a point in an area? </a:t>
             </a:r>
           </a:p>
           <a:p>
             <a:pPr lvl="1"/>
             <a:r>
               <a:rPr lang="en-US" dirty="0"/>
-              <a:t>Points allow all the other spatial functions like distance to work correctly. </a:t>
+              <a:t>How large is an area? </a:t>
+            </a:r>
+          </a:p>
+          <a:p>
+            <a:r>
+              <a:rPr lang="en-US" dirty="0"/>
+              <a:t>These geometry attributes can be mapped just like state/country in Tableau. </a:t>
             </a:r>
           </a:p>
         </p:txBody>
@@ -6945,7 +7474,7 @@
     </p:spTree>
     <p:extLst>
       <p:ext uri="{BB962C8B-B14F-4D97-AF65-F5344CB8AC3E}">
-        <p14:creationId xmlns:p14="http://schemas.microsoft.com/office/powerpoint/2010/main" val="3966902185"/>
+        <p14:creationId xmlns:p14="http://schemas.microsoft.com/office/powerpoint/2010/main" val="4068685130"/>
       </p:ext>
     </p:extLst>
   </p:cSld>
